--- a/2024-04-15/03_notifications.pptx
+++ b/2024-04-15/03_notifications.pptx
@@ -5,25 +5,33 @@
     <p:sldMasterId id="2147483686" r:id="rId1"/>
   </p:sldMasterIdLst>
   <p:notesMasterIdLst>
-    <p:notesMasterId r:id="rId15"/>
+    <p:notesMasterId r:id="rId23"/>
   </p:notesMasterIdLst>
   <p:handoutMasterIdLst>
-    <p:handoutMasterId r:id="rId16"/>
+    <p:handoutMasterId r:id="rId24"/>
   </p:handoutMasterIdLst>
   <p:sldIdLst>
     <p:sldId id="1218" r:id="rId2"/>
     <p:sldId id="1233" r:id="rId3"/>
     <p:sldId id="1234" r:id="rId4"/>
     <p:sldId id="1226" r:id="rId5"/>
-    <p:sldId id="1219" r:id="rId6"/>
-    <p:sldId id="1225" r:id="rId7"/>
-    <p:sldId id="1228" r:id="rId8"/>
-    <p:sldId id="1229" r:id="rId9"/>
-    <p:sldId id="1230" r:id="rId10"/>
-    <p:sldId id="1231" r:id="rId11"/>
-    <p:sldId id="1224" r:id="rId12"/>
-    <p:sldId id="1227" r:id="rId13"/>
-    <p:sldId id="1232" r:id="rId14"/>
+    <p:sldId id="1241" r:id="rId6"/>
+    <p:sldId id="1242" r:id="rId7"/>
+    <p:sldId id="1235" r:id="rId8"/>
+    <p:sldId id="1240" r:id="rId9"/>
+    <p:sldId id="1236" r:id="rId10"/>
+    <p:sldId id="1237" r:id="rId11"/>
+    <p:sldId id="1238" r:id="rId12"/>
+    <p:sldId id="1239" r:id="rId13"/>
+    <p:sldId id="1219" r:id="rId14"/>
+    <p:sldId id="1225" r:id="rId15"/>
+    <p:sldId id="1228" r:id="rId16"/>
+    <p:sldId id="1229" r:id="rId17"/>
+    <p:sldId id="1230" r:id="rId18"/>
+    <p:sldId id="1231" r:id="rId19"/>
+    <p:sldId id="1224" r:id="rId20"/>
+    <p:sldId id="1227" r:id="rId21"/>
+    <p:sldId id="1232" r:id="rId22"/>
   </p:sldIdLst>
   <p:sldSz cx="9144000" cy="6858000" type="screen4x3"/>
   <p:notesSz cx="6797675" cy="9926638"/>
@@ -292,7 +300,7 @@
               <a:pPr>
                 <a:defRPr/>
               </a:pPr>
-              <a:t>09.04.2024</a:t>
+              <a:t>08.05.2025</a:t>
             </a:fld>
             <a:endParaRPr lang="de-AT"/>
           </a:p>
@@ -507,7 +515,7 @@
               <a:pPr>
                 <a:defRPr/>
               </a:pPr>
-              <a:t>09.04.2024</a:t>
+              <a:t>08.05.2025</a:t>
             </a:fld>
             <a:endParaRPr lang="de-AT"/>
           </a:p>
@@ -882,775 +890,8 @@
           <a:p>
             <a:r>
               <a:rPr lang="de-AT" dirty="0"/>
-              <a:t>alias: Aufforderung Tablette zu nehmen</a:t>
-            </a:r>
-          </a:p>
-          <a:p>
-            <a:r>
-              <a:rPr lang="de-AT" dirty="0" err="1"/>
-              <a:t>description</a:t>
-            </a:r>
-            <a:r>
-              <a:rPr lang="de-AT" dirty="0"/>
-              <a:t>: &gt;-</a:t>
-            </a:r>
-          </a:p>
-          <a:p>
-            <a:r>
-              <a:rPr lang="de-AT" dirty="0"/>
-              <a:t>  Der Benutzer wird täglich am Abend erinnert, eine Tablette zu nehmen.</a:t>
-            </a:r>
-          </a:p>
-          <a:p>
-            <a:endParaRPr lang="de-AT" dirty="0"/>
-          </a:p>
-          <a:p>
-            <a:r>
-              <a:rPr lang="de-AT" dirty="0"/>
-              <a:t>  Er muss diese Erinnerung bestätigen, sonst wird die Verständigung alle 10</a:t>
-            </a:r>
-          </a:p>
-          <a:p>
-            <a:r>
-              <a:rPr lang="de-AT" dirty="0"/>
-              <a:t>  Minuten wiederholt.</a:t>
-            </a:r>
-          </a:p>
-          <a:p>
-            <a:r>
-              <a:rPr lang="de-AT" dirty="0" err="1"/>
-              <a:t>trigger</a:t>
-            </a:r>
-            <a:r>
-              <a:rPr lang="de-AT" dirty="0"/>
-              <a:t>:</a:t>
-            </a:r>
-          </a:p>
-          <a:p>
-            <a:r>
-              <a:rPr lang="de-AT" dirty="0"/>
-              <a:t>  - </a:t>
-            </a:r>
-            <a:r>
-              <a:rPr lang="de-AT" dirty="0" err="1"/>
-              <a:t>platform</a:t>
-            </a:r>
-            <a:r>
-              <a:rPr lang="de-AT" dirty="0"/>
-              <a:t>: time</a:t>
-            </a:r>
-          </a:p>
-          <a:p>
-            <a:r>
-              <a:rPr lang="de-AT" dirty="0"/>
-              <a:t>    at: "20:00:00"</a:t>
-            </a:r>
-          </a:p>
-          <a:p>
-            <a:r>
-              <a:rPr lang="de-AT" dirty="0"/>
-              <a:t>    </a:t>
-            </a:r>
-            <a:r>
-              <a:rPr lang="de-AT" dirty="0" err="1"/>
-              <a:t>id</a:t>
-            </a:r>
-            <a:r>
-              <a:rPr lang="de-AT" dirty="0"/>
-              <a:t>: </a:t>
-            </a:r>
-            <a:r>
-              <a:rPr lang="de-AT" dirty="0" err="1"/>
-              <a:t>zeit_tablette_zu_nehmen</a:t>
-            </a:r>
-            <a:endParaRPr lang="de-AT" dirty="0"/>
-          </a:p>
-          <a:p>
-            <a:r>
-              <a:rPr lang="de-AT" dirty="0"/>
-              <a:t>  - </a:t>
-            </a:r>
-            <a:r>
-              <a:rPr lang="de-AT" dirty="0" err="1"/>
-              <a:t>platform</a:t>
-            </a:r>
-            <a:r>
-              <a:rPr lang="de-AT" dirty="0"/>
-              <a:t>: </a:t>
-            </a:r>
-            <a:r>
-              <a:rPr lang="de-AT" dirty="0" err="1"/>
-              <a:t>event</a:t>
-            </a:r>
-            <a:endParaRPr lang="de-AT" dirty="0"/>
-          </a:p>
-          <a:p>
-            <a:r>
-              <a:rPr lang="de-AT" dirty="0"/>
-              <a:t>    </a:t>
-            </a:r>
-            <a:r>
-              <a:rPr lang="de-AT" dirty="0" err="1"/>
-              <a:t>event_type</a:t>
-            </a:r>
-            <a:r>
-              <a:rPr lang="de-AT" dirty="0"/>
-              <a:t>: </a:t>
-            </a:r>
-            <a:r>
-              <a:rPr lang="de-AT" dirty="0" err="1"/>
-              <a:t>mobile_app_notification_action</a:t>
-            </a:r>
-            <a:endParaRPr lang="de-AT" dirty="0"/>
-          </a:p>
-          <a:p>
-            <a:r>
-              <a:rPr lang="de-AT" dirty="0"/>
-              <a:t>    </a:t>
-            </a:r>
-            <a:r>
-              <a:rPr lang="de-AT" dirty="0" err="1"/>
-              <a:t>event_data</a:t>
-            </a:r>
-            <a:r>
-              <a:rPr lang="de-AT" dirty="0"/>
-              <a:t>:</a:t>
-            </a:r>
-          </a:p>
-          <a:p>
-            <a:r>
-              <a:rPr lang="de-AT" dirty="0"/>
-              <a:t>      </a:t>
-            </a:r>
-            <a:r>
-              <a:rPr lang="de-AT" dirty="0" err="1"/>
-              <a:t>action</a:t>
-            </a:r>
-            <a:r>
-              <a:rPr lang="de-AT" dirty="0"/>
-              <a:t>: TABLETTE_GENOMMEN</a:t>
-            </a:r>
-          </a:p>
-          <a:p>
-            <a:r>
-              <a:rPr lang="de-AT" dirty="0"/>
-              <a:t>    </a:t>
-            </a:r>
-            <a:r>
-              <a:rPr lang="de-AT" dirty="0" err="1"/>
-              <a:t>id</a:t>
-            </a:r>
-            <a:r>
-              <a:rPr lang="de-AT" dirty="0"/>
-              <a:t>: </a:t>
-            </a:r>
-            <a:r>
-              <a:rPr lang="de-AT" dirty="0" err="1"/>
-              <a:t>tablette_wurde_genommen</a:t>
-            </a:r>
-            <a:endParaRPr lang="de-AT" dirty="0"/>
-          </a:p>
-          <a:p>
-            <a:r>
-              <a:rPr lang="de-AT" dirty="0" err="1"/>
-              <a:t>condition</a:t>
-            </a:r>
-            <a:r>
-              <a:rPr lang="de-AT" dirty="0"/>
-              <a:t>: []</a:t>
-            </a:r>
-          </a:p>
-          <a:p>
-            <a:r>
-              <a:rPr lang="de-AT" dirty="0" err="1"/>
-              <a:t>action</a:t>
-            </a:r>
-            <a:r>
-              <a:rPr lang="de-AT" dirty="0"/>
-              <a:t>:</a:t>
-            </a:r>
-          </a:p>
-          <a:p>
-            <a:r>
-              <a:rPr lang="de-AT" dirty="0"/>
-              <a:t>  - </a:t>
-            </a:r>
-            <a:r>
-              <a:rPr lang="de-AT" dirty="0" err="1"/>
-              <a:t>choose</a:t>
-            </a:r>
-            <a:r>
-              <a:rPr lang="de-AT" dirty="0"/>
-              <a:t>:</a:t>
-            </a:r>
-          </a:p>
-          <a:p>
-            <a:r>
-              <a:rPr lang="de-AT" dirty="0"/>
-              <a:t>      - </a:t>
-            </a:r>
-            <a:r>
-              <a:rPr lang="de-AT" dirty="0" err="1"/>
-              <a:t>conditions</a:t>
-            </a:r>
-            <a:r>
-              <a:rPr lang="de-AT" dirty="0"/>
-              <a:t>:</a:t>
-            </a:r>
-          </a:p>
-          <a:p>
-            <a:r>
-              <a:rPr lang="de-AT" dirty="0"/>
-              <a:t>          - </a:t>
-            </a:r>
-            <a:r>
-              <a:rPr lang="de-AT" dirty="0" err="1"/>
-              <a:t>condition</a:t>
-            </a:r>
-            <a:r>
-              <a:rPr lang="de-AT" dirty="0"/>
-              <a:t>: </a:t>
-            </a:r>
-            <a:r>
-              <a:rPr lang="de-AT" dirty="0" err="1"/>
-              <a:t>trigger</a:t>
-            </a:r>
-            <a:endParaRPr lang="de-AT" dirty="0"/>
-          </a:p>
-          <a:p>
-            <a:r>
-              <a:rPr lang="de-AT" dirty="0"/>
-              <a:t>            </a:t>
-            </a:r>
-            <a:r>
-              <a:rPr lang="de-AT" dirty="0" err="1"/>
-              <a:t>id</a:t>
-            </a:r>
-            <a:r>
-              <a:rPr lang="de-AT" dirty="0"/>
-              <a:t>:</a:t>
-            </a:r>
-          </a:p>
-          <a:p>
-            <a:r>
-              <a:rPr lang="de-AT" dirty="0"/>
-              <a:t>              - </a:t>
-            </a:r>
-            <a:r>
-              <a:rPr lang="de-AT" dirty="0" err="1"/>
-              <a:t>zeit_tablette_zu_nehmen</a:t>
-            </a:r>
-            <a:endParaRPr lang="de-AT" dirty="0"/>
-          </a:p>
-          <a:p>
-            <a:r>
-              <a:rPr lang="de-AT" dirty="0"/>
-              <a:t>        </a:t>
-            </a:r>
-            <a:r>
-              <a:rPr lang="de-AT" dirty="0" err="1"/>
-              <a:t>sequence</a:t>
-            </a:r>
-            <a:r>
-              <a:rPr lang="de-AT" dirty="0"/>
-              <a:t>:</a:t>
-            </a:r>
-          </a:p>
-          <a:p>
-            <a:r>
-              <a:rPr lang="de-AT" dirty="0"/>
-              <a:t>          - </a:t>
-            </a:r>
-            <a:r>
-              <a:rPr lang="de-AT" dirty="0" err="1"/>
-              <a:t>service</a:t>
-            </a:r>
-            <a:r>
-              <a:rPr lang="de-AT" dirty="0"/>
-              <a:t>: </a:t>
-            </a:r>
-            <a:r>
-              <a:rPr lang="de-AT" dirty="0" err="1"/>
-              <a:t>input_boolean.turn_off</a:t>
-            </a:r>
-            <a:endParaRPr lang="de-AT" dirty="0"/>
-          </a:p>
-          <a:p>
-            <a:r>
-              <a:rPr lang="de-AT" dirty="0"/>
-              <a:t>            </a:t>
-            </a:r>
-            <a:r>
-              <a:rPr lang="de-AT" dirty="0" err="1"/>
-              <a:t>metadata</a:t>
-            </a:r>
-            <a:r>
-              <a:rPr lang="de-AT" dirty="0"/>
-              <a:t>: {}</a:t>
-            </a:r>
-          </a:p>
-          <a:p>
-            <a:r>
-              <a:rPr lang="de-AT" dirty="0"/>
-              <a:t>            </a:t>
-            </a:r>
-            <a:r>
-              <a:rPr lang="de-AT" dirty="0" err="1"/>
-              <a:t>data</a:t>
-            </a:r>
-            <a:r>
-              <a:rPr lang="de-AT" dirty="0"/>
-              <a:t>: {}</a:t>
-            </a:r>
-          </a:p>
-          <a:p>
-            <a:r>
-              <a:rPr lang="de-AT" dirty="0"/>
-              <a:t>            </a:t>
-            </a:r>
-            <a:r>
-              <a:rPr lang="de-AT" dirty="0" err="1"/>
-              <a:t>target</a:t>
-            </a:r>
-            <a:r>
-              <a:rPr lang="de-AT" dirty="0"/>
-              <a:t>:</a:t>
-            </a:r>
-          </a:p>
-          <a:p>
-            <a:r>
-              <a:rPr lang="de-AT" dirty="0"/>
-              <a:t>              </a:t>
-            </a:r>
-            <a:r>
-              <a:rPr lang="de-AT" dirty="0" err="1"/>
-              <a:t>entity_id</a:t>
-            </a:r>
-            <a:r>
-              <a:rPr lang="de-AT" dirty="0"/>
-              <a:t>: </a:t>
-            </a:r>
-            <a:r>
-              <a:rPr lang="de-AT" dirty="0" err="1"/>
-              <a:t>input_boolean.tablette_genommen</a:t>
-            </a:r>
-            <a:endParaRPr lang="de-AT" dirty="0"/>
-          </a:p>
-          <a:p>
-            <a:r>
-              <a:rPr lang="de-AT" dirty="0"/>
-              <a:t>          - </a:t>
-            </a:r>
-            <a:r>
-              <a:rPr lang="de-AT" dirty="0" err="1"/>
-              <a:t>repeat</a:t>
-            </a:r>
-            <a:r>
-              <a:rPr lang="de-AT" dirty="0"/>
-              <a:t>:</a:t>
-            </a:r>
-          </a:p>
-          <a:p>
-            <a:r>
-              <a:rPr lang="de-AT" dirty="0"/>
-              <a:t>              </a:t>
-            </a:r>
-            <a:r>
-              <a:rPr lang="de-AT" dirty="0" err="1"/>
-              <a:t>sequence</a:t>
-            </a:r>
-            <a:r>
-              <a:rPr lang="de-AT" dirty="0"/>
-              <a:t>:</a:t>
-            </a:r>
-          </a:p>
-          <a:p>
-            <a:r>
-              <a:rPr lang="de-AT" dirty="0"/>
-              <a:t>                - </a:t>
-            </a:r>
-            <a:r>
-              <a:rPr lang="de-AT" dirty="0" err="1"/>
-              <a:t>service</a:t>
-            </a:r>
-            <a:r>
-              <a:rPr lang="de-AT" dirty="0"/>
-              <a:t>: </a:t>
-            </a:r>
-            <a:r>
-              <a:rPr lang="de-AT" dirty="0" err="1"/>
-              <a:t>notify.mobile_app_leos_handy</a:t>
-            </a:r>
-            <a:endParaRPr lang="de-AT" dirty="0"/>
-          </a:p>
-          <a:p>
-            <a:r>
-              <a:rPr lang="de-AT" dirty="0"/>
-              <a:t>                  </a:t>
-            </a:r>
-            <a:r>
-              <a:rPr lang="de-AT" dirty="0" err="1"/>
-              <a:t>data</a:t>
-            </a:r>
-            <a:r>
-              <a:rPr lang="de-AT" dirty="0"/>
-              <a:t>:</a:t>
-            </a:r>
-          </a:p>
-          <a:p>
-            <a:r>
-              <a:rPr lang="de-AT" dirty="0"/>
-              <a:t>                    </a:t>
-            </a:r>
-            <a:r>
-              <a:rPr lang="de-AT" dirty="0" err="1"/>
-              <a:t>message</a:t>
-            </a:r>
-            <a:r>
-              <a:rPr lang="de-AT" dirty="0"/>
-              <a:t>: Tablette nehmen</a:t>
-            </a:r>
-          </a:p>
-          <a:p>
-            <a:r>
-              <a:rPr lang="de-AT" dirty="0"/>
-              <a:t>                    title: Tablette</a:t>
-            </a:r>
-          </a:p>
-          <a:p>
-            <a:r>
-              <a:rPr lang="de-AT" dirty="0"/>
-              <a:t>                    </a:t>
-            </a:r>
-            <a:r>
-              <a:rPr lang="de-AT" dirty="0" err="1"/>
-              <a:t>data</a:t>
-            </a:r>
-            <a:r>
-              <a:rPr lang="de-AT" dirty="0"/>
-              <a:t>:</a:t>
-            </a:r>
-          </a:p>
-          <a:p>
-            <a:r>
-              <a:rPr lang="de-AT" dirty="0"/>
-              <a:t>                      </a:t>
-            </a:r>
-            <a:r>
-              <a:rPr lang="de-AT" dirty="0" err="1"/>
-              <a:t>actions</a:t>
-            </a:r>
-            <a:r>
-              <a:rPr lang="de-AT" dirty="0"/>
-              <a:t>:</a:t>
-            </a:r>
-          </a:p>
-          <a:p>
-            <a:r>
-              <a:rPr lang="de-AT" dirty="0"/>
-              <a:t>                        - </a:t>
-            </a:r>
-            <a:r>
-              <a:rPr lang="de-AT" dirty="0" err="1"/>
-              <a:t>action</a:t>
-            </a:r>
-            <a:r>
-              <a:rPr lang="de-AT" dirty="0"/>
-              <a:t>: TABLETTE_GENOMMEN</a:t>
-            </a:r>
-          </a:p>
-          <a:p>
-            <a:r>
-              <a:rPr lang="de-AT" dirty="0"/>
-              <a:t>                          title: Tablette genommen</a:t>
-            </a:r>
-          </a:p>
-          <a:p>
-            <a:r>
-              <a:rPr lang="de-AT" dirty="0"/>
-              <a:t>                - </a:t>
-            </a:r>
-            <a:r>
-              <a:rPr lang="de-AT" dirty="0" err="1"/>
-              <a:t>delay</a:t>
-            </a:r>
-            <a:r>
-              <a:rPr lang="de-AT" dirty="0"/>
-              <a:t>:</a:t>
-            </a:r>
-          </a:p>
-          <a:p>
-            <a:r>
-              <a:rPr lang="de-AT" dirty="0"/>
-              <a:t>                    </a:t>
-            </a:r>
-            <a:r>
-              <a:rPr lang="de-AT" dirty="0" err="1"/>
-              <a:t>hours</a:t>
-            </a:r>
-            <a:r>
-              <a:rPr lang="de-AT" dirty="0"/>
-              <a:t>: 0</a:t>
-            </a:r>
-          </a:p>
-          <a:p>
-            <a:r>
-              <a:rPr lang="de-AT" dirty="0"/>
-              <a:t>                    </a:t>
-            </a:r>
-            <a:r>
-              <a:rPr lang="de-AT" dirty="0" err="1"/>
-              <a:t>minutes</a:t>
-            </a:r>
-            <a:r>
-              <a:rPr lang="de-AT" dirty="0"/>
-              <a:t>: 10</a:t>
-            </a:r>
-          </a:p>
-          <a:p>
-            <a:r>
-              <a:rPr lang="de-AT" dirty="0"/>
-              <a:t>                    </a:t>
-            </a:r>
-            <a:r>
-              <a:rPr lang="de-AT" dirty="0" err="1"/>
-              <a:t>seconds</a:t>
-            </a:r>
-            <a:r>
-              <a:rPr lang="de-AT" dirty="0"/>
-              <a:t>: 0</a:t>
-            </a:r>
-          </a:p>
-          <a:p>
-            <a:r>
-              <a:rPr lang="de-AT" dirty="0"/>
-              <a:t>                    </a:t>
-            </a:r>
-            <a:r>
-              <a:rPr lang="de-AT" dirty="0" err="1"/>
-              <a:t>milliseconds</a:t>
-            </a:r>
-            <a:r>
-              <a:rPr lang="de-AT" dirty="0"/>
-              <a:t>: 0</a:t>
-            </a:r>
-          </a:p>
-          <a:p>
-            <a:r>
-              <a:rPr lang="de-AT" dirty="0"/>
-              <a:t>              </a:t>
-            </a:r>
-            <a:r>
-              <a:rPr lang="de-AT" dirty="0" err="1"/>
-              <a:t>until</a:t>
-            </a:r>
-            <a:r>
-              <a:rPr lang="de-AT" dirty="0"/>
-              <a:t>:</a:t>
-            </a:r>
-          </a:p>
-          <a:p>
-            <a:r>
-              <a:rPr lang="de-AT" dirty="0"/>
-              <a:t>                - </a:t>
-            </a:r>
-            <a:r>
-              <a:rPr lang="de-AT" dirty="0" err="1"/>
-              <a:t>condition</a:t>
-            </a:r>
-            <a:r>
-              <a:rPr lang="de-AT" dirty="0"/>
-              <a:t>: </a:t>
-            </a:r>
-            <a:r>
-              <a:rPr lang="de-AT" dirty="0" err="1"/>
-              <a:t>state</a:t>
-            </a:r>
-            <a:endParaRPr lang="de-AT" dirty="0"/>
-          </a:p>
-          <a:p>
-            <a:r>
-              <a:rPr lang="de-AT" dirty="0"/>
-              <a:t>                  </a:t>
-            </a:r>
-            <a:r>
-              <a:rPr lang="de-AT" dirty="0" err="1"/>
-              <a:t>entity_id</a:t>
-            </a:r>
-            <a:r>
-              <a:rPr lang="de-AT" dirty="0"/>
-              <a:t>: </a:t>
-            </a:r>
-            <a:r>
-              <a:rPr lang="de-AT" dirty="0" err="1"/>
-              <a:t>input_boolean.tablette_genommen</a:t>
-            </a:r>
-            <a:endParaRPr lang="de-AT" dirty="0"/>
-          </a:p>
-          <a:p>
-            <a:r>
-              <a:rPr lang="de-AT" dirty="0"/>
-              <a:t>                  </a:t>
-            </a:r>
-            <a:r>
-              <a:rPr lang="de-AT" dirty="0" err="1"/>
-              <a:t>state</a:t>
-            </a:r>
-            <a:r>
-              <a:rPr lang="de-AT" dirty="0"/>
-              <a:t>: "on"</a:t>
-            </a:r>
-          </a:p>
-          <a:p>
-            <a:r>
-              <a:rPr lang="de-AT" dirty="0"/>
-              <a:t>      - </a:t>
-            </a:r>
-            <a:r>
-              <a:rPr lang="de-AT" dirty="0" err="1"/>
-              <a:t>conditions</a:t>
-            </a:r>
-            <a:r>
-              <a:rPr lang="de-AT" dirty="0"/>
-              <a:t>:</a:t>
-            </a:r>
-          </a:p>
-          <a:p>
-            <a:r>
-              <a:rPr lang="de-AT" dirty="0"/>
-              <a:t>          - </a:t>
-            </a:r>
-            <a:r>
-              <a:rPr lang="de-AT" dirty="0" err="1"/>
-              <a:t>condition</a:t>
-            </a:r>
-            <a:r>
-              <a:rPr lang="de-AT" dirty="0"/>
-              <a:t>: </a:t>
-            </a:r>
-            <a:r>
-              <a:rPr lang="de-AT" dirty="0" err="1"/>
-              <a:t>trigger</a:t>
-            </a:r>
-            <a:endParaRPr lang="de-AT" dirty="0"/>
-          </a:p>
-          <a:p>
-            <a:r>
-              <a:rPr lang="de-AT" dirty="0"/>
-              <a:t>            </a:t>
-            </a:r>
-            <a:r>
-              <a:rPr lang="de-AT" dirty="0" err="1"/>
-              <a:t>id</a:t>
-            </a:r>
-            <a:r>
-              <a:rPr lang="de-AT" dirty="0"/>
-              <a:t>:</a:t>
-            </a:r>
-          </a:p>
-          <a:p>
-            <a:r>
-              <a:rPr lang="de-AT" dirty="0"/>
-              <a:t>              - </a:t>
-            </a:r>
-            <a:r>
-              <a:rPr lang="de-AT" dirty="0" err="1"/>
-              <a:t>tablette_wurde_genommen</a:t>
-            </a:r>
-            <a:endParaRPr lang="de-AT" dirty="0"/>
-          </a:p>
-          <a:p>
-            <a:r>
-              <a:rPr lang="de-AT" dirty="0"/>
-              <a:t>        </a:t>
-            </a:r>
-            <a:r>
-              <a:rPr lang="de-AT" dirty="0" err="1"/>
-              <a:t>sequence</a:t>
-            </a:r>
-            <a:r>
-              <a:rPr lang="de-AT" dirty="0"/>
-              <a:t>:</a:t>
-            </a:r>
-          </a:p>
-          <a:p>
-            <a:r>
-              <a:rPr lang="de-AT" dirty="0"/>
-              <a:t>          - </a:t>
-            </a:r>
-            <a:r>
-              <a:rPr lang="de-AT" dirty="0" err="1"/>
-              <a:t>service</a:t>
-            </a:r>
-            <a:r>
-              <a:rPr lang="de-AT" dirty="0"/>
-              <a:t>: </a:t>
-            </a:r>
-            <a:r>
-              <a:rPr lang="de-AT" dirty="0" err="1"/>
-              <a:t>input_boolean.turn_on</a:t>
-            </a:r>
-            <a:endParaRPr lang="de-AT" dirty="0"/>
-          </a:p>
-          <a:p>
-            <a:r>
-              <a:rPr lang="de-AT" dirty="0"/>
-              <a:t>            </a:t>
-            </a:r>
-            <a:r>
-              <a:rPr lang="de-AT" dirty="0" err="1"/>
-              <a:t>target</a:t>
-            </a:r>
-            <a:r>
-              <a:rPr lang="de-AT" dirty="0"/>
-              <a:t>:</a:t>
-            </a:r>
-          </a:p>
-          <a:p>
-            <a:r>
-              <a:rPr lang="de-AT" dirty="0"/>
-              <a:t>              </a:t>
-            </a:r>
-            <a:r>
-              <a:rPr lang="de-AT" dirty="0" err="1"/>
-              <a:t>entity_id</a:t>
-            </a:r>
-            <a:r>
-              <a:rPr lang="de-AT" dirty="0"/>
-              <a:t>: </a:t>
-            </a:r>
-            <a:r>
-              <a:rPr lang="de-AT" dirty="0" err="1"/>
-              <a:t>input_boolean.tablette_genommen</a:t>
-            </a:r>
-            <a:endParaRPr lang="de-AT" dirty="0"/>
-          </a:p>
-          <a:p>
-            <a:r>
-              <a:rPr lang="de-AT" dirty="0"/>
-              <a:t>            </a:t>
-            </a:r>
-            <a:r>
-              <a:rPr lang="de-AT" dirty="0" err="1"/>
-              <a:t>data</a:t>
-            </a:r>
-            <a:r>
-              <a:rPr lang="de-AT" dirty="0"/>
-              <a:t>: {}</a:t>
-            </a:r>
-          </a:p>
-          <a:p>
-            <a:r>
-              <a:rPr lang="de-AT" dirty="0" err="1"/>
-              <a:t>mode</a:t>
-            </a:r>
-            <a:r>
-              <a:rPr lang="de-AT" dirty="0"/>
-              <a:t>: parallel</a:t>
-            </a:r>
-          </a:p>
-          <a:p>
-            <a:endParaRPr lang="de-AT" dirty="0"/>
+              <a:t>https://emojipedia.org/</a:t>
+            </a:r>
           </a:p>
         </p:txBody>
       </p:sp>
@@ -1677,7 +918,872 @@
               <a:pPr>
                 <a:defRPr/>
               </a:pPr>
-              <a:t>13</a:t>
+              <a:t>7</a:t>
+            </a:fld>
+            <a:endParaRPr lang="de-AT"/>
+          </a:p>
+        </p:txBody>
+      </p:sp>
+    </p:spTree>
+    <p:extLst>
+      <p:ext uri="{BB962C8B-B14F-4D97-AF65-F5344CB8AC3E}">
+        <p14:creationId xmlns:p14="http://schemas.microsoft.com/office/powerpoint/2010/main" val="2580978060"/>
+      </p:ext>
+    </p:extLst>
+  </p:cSld>
+  <p:clrMapOvr>
+    <a:masterClrMapping/>
+  </p:clrMapOvr>
+</p:notes>
+</file>
+
+<file path=ppt/notesSlides/notesSlide2.xml><?xml version="1.0" encoding="utf-8"?>
+<p:notes xmlns:a="http://schemas.openxmlformats.org/drawingml/2006/main" xmlns:r="http://schemas.openxmlformats.org/officeDocument/2006/relationships" xmlns:p="http://schemas.openxmlformats.org/presentationml/2006/main">
+  <p:cSld>
+    <p:spTree>
+      <p:nvGrpSpPr>
+        <p:cNvPr id="1" name=""/>
+        <p:cNvGrpSpPr/>
+        <p:nvPr/>
+      </p:nvGrpSpPr>
+      <p:grpSpPr>
+        <a:xfrm>
+          <a:off x="0" y="0"/>
+          <a:ext cx="0" cy="0"/>
+          <a:chOff x="0" y="0"/>
+          <a:chExt cx="0" cy="0"/>
+        </a:xfrm>
+      </p:grpSpPr>
+      <p:sp>
+        <p:nvSpPr>
+          <p:cNvPr id="2" name="Folienbildplatzhalter 1"/>
+          <p:cNvSpPr>
+            <a:spLocks noGrp="1" noRot="1" noChangeAspect="1"/>
+          </p:cNvSpPr>
+          <p:nvPr>
+            <p:ph type="sldImg"/>
+          </p:nvPr>
+        </p:nvSpPr>
+        <p:spPr>
+          <a:xfrm>
+            <a:off x="917575" y="744538"/>
+            <a:ext cx="4962525" cy="3722687"/>
+          </a:xfrm>
+        </p:spPr>
+      </p:sp>
+      <p:sp>
+        <p:nvSpPr>
+          <p:cNvPr id="3" name="Notizenplatzhalter 2"/>
+          <p:cNvSpPr>
+            <a:spLocks noGrp="1"/>
+          </p:cNvSpPr>
+          <p:nvPr>
+            <p:ph type="body" idx="1"/>
+          </p:nvPr>
+        </p:nvSpPr>
+        <p:spPr/>
+        <p:txBody>
+          <a:bodyPr/>
+          <a:lstStyle/>
+          <a:p>
+            <a:r>
+              <a:rPr lang="de-AT" dirty="0"/>
+              <a:t>alias: Aufforderung Tablette zu nehmen</a:t>
+            </a:r>
+          </a:p>
+          <a:p>
+            <a:r>
+              <a:rPr lang="de-AT" dirty="0" err="1"/>
+              <a:t>description</a:t>
+            </a:r>
+            <a:r>
+              <a:rPr lang="de-AT" dirty="0"/>
+              <a:t>: &gt;-</a:t>
+            </a:r>
+          </a:p>
+          <a:p>
+            <a:r>
+              <a:rPr lang="de-AT" dirty="0"/>
+              <a:t>  Der Benutzer wird täglich am Abend erinnert, eine Tablette zu nehmen.</a:t>
+            </a:r>
+          </a:p>
+          <a:p>
+            <a:endParaRPr lang="de-AT" dirty="0"/>
+          </a:p>
+          <a:p>
+            <a:r>
+              <a:rPr lang="de-AT" dirty="0"/>
+              <a:t>  Er muss diese Erinnerung bestätigen, sonst wird die Verständigung alle 10</a:t>
+            </a:r>
+          </a:p>
+          <a:p>
+            <a:r>
+              <a:rPr lang="de-AT" dirty="0"/>
+              <a:t>  Minuten wiederholt.</a:t>
+            </a:r>
+          </a:p>
+          <a:p>
+            <a:r>
+              <a:rPr lang="de-AT" dirty="0" err="1"/>
+              <a:t>trigger</a:t>
+            </a:r>
+            <a:r>
+              <a:rPr lang="de-AT" dirty="0"/>
+              <a:t>:</a:t>
+            </a:r>
+          </a:p>
+          <a:p>
+            <a:r>
+              <a:rPr lang="de-AT" dirty="0"/>
+              <a:t>  - </a:t>
+            </a:r>
+            <a:r>
+              <a:rPr lang="de-AT" dirty="0" err="1"/>
+              <a:t>platform</a:t>
+            </a:r>
+            <a:r>
+              <a:rPr lang="de-AT" dirty="0"/>
+              <a:t>: time</a:t>
+            </a:r>
+          </a:p>
+          <a:p>
+            <a:r>
+              <a:rPr lang="de-AT" dirty="0"/>
+              <a:t>    at: "20:00:00"</a:t>
+            </a:r>
+          </a:p>
+          <a:p>
+            <a:r>
+              <a:rPr lang="de-AT" dirty="0"/>
+              <a:t>    </a:t>
+            </a:r>
+            <a:r>
+              <a:rPr lang="de-AT" dirty="0" err="1"/>
+              <a:t>id</a:t>
+            </a:r>
+            <a:r>
+              <a:rPr lang="de-AT" dirty="0"/>
+              <a:t>: </a:t>
+            </a:r>
+            <a:r>
+              <a:rPr lang="de-AT" dirty="0" err="1"/>
+              <a:t>zeit_tablette_zu_nehmen</a:t>
+            </a:r>
+            <a:endParaRPr lang="de-AT" dirty="0"/>
+          </a:p>
+          <a:p>
+            <a:r>
+              <a:rPr lang="de-AT" dirty="0"/>
+              <a:t>  - </a:t>
+            </a:r>
+            <a:r>
+              <a:rPr lang="de-AT" dirty="0" err="1"/>
+              <a:t>platform</a:t>
+            </a:r>
+            <a:r>
+              <a:rPr lang="de-AT" dirty="0"/>
+              <a:t>: </a:t>
+            </a:r>
+            <a:r>
+              <a:rPr lang="de-AT" dirty="0" err="1"/>
+              <a:t>event</a:t>
+            </a:r>
+            <a:endParaRPr lang="de-AT" dirty="0"/>
+          </a:p>
+          <a:p>
+            <a:r>
+              <a:rPr lang="de-AT" dirty="0"/>
+              <a:t>    </a:t>
+            </a:r>
+            <a:r>
+              <a:rPr lang="de-AT" dirty="0" err="1"/>
+              <a:t>event_type</a:t>
+            </a:r>
+            <a:r>
+              <a:rPr lang="de-AT" dirty="0"/>
+              <a:t>: </a:t>
+            </a:r>
+            <a:r>
+              <a:rPr lang="de-AT" dirty="0" err="1"/>
+              <a:t>mobile_app_notification_action</a:t>
+            </a:r>
+            <a:endParaRPr lang="de-AT" dirty="0"/>
+          </a:p>
+          <a:p>
+            <a:r>
+              <a:rPr lang="de-AT" dirty="0"/>
+              <a:t>    </a:t>
+            </a:r>
+            <a:r>
+              <a:rPr lang="de-AT" dirty="0" err="1"/>
+              <a:t>event_data</a:t>
+            </a:r>
+            <a:r>
+              <a:rPr lang="de-AT" dirty="0"/>
+              <a:t>:</a:t>
+            </a:r>
+          </a:p>
+          <a:p>
+            <a:r>
+              <a:rPr lang="de-AT" dirty="0"/>
+              <a:t>      </a:t>
+            </a:r>
+            <a:r>
+              <a:rPr lang="de-AT" dirty="0" err="1"/>
+              <a:t>action</a:t>
+            </a:r>
+            <a:r>
+              <a:rPr lang="de-AT" dirty="0"/>
+              <a:t>: TABLETTE_GENOMMEN</a:t>
+            </a:r>
+          </a:p>
+          <a:p>
+            <a:r>
+              <a:rPr lang="de-AT" dirty="0"/>
+              <a:t>    </a:t>
+            </a:r>
+            <a:r>
+              <a:rPr lang="de-AT" dirty="0" err="1"/>
+              <a:t>id</a:t>
+            </a:r>
+            <a:r>
+              <a:rPr lang="de-AT" dirty="0"/>
+              <a:t>: </a:t>
+            </a:r>
+            <a:r>
+              <a:rPr lang="de-AT" dirty="0" err="1"/>
+              <a:t>tablette_wurde_genommen</a:t>
+            </a:r>
+            <a:endParaRPr lang="de-AT" dirty="0"/>
+          </a:p>
+          <a:p>
+            <a:r>
+              <a:rPr lang="de-AT" dirty="0" err="1"/>
+              <a:t>condition</a:t>
+            </a:r>
+            <a:r>
+              <a:rPr lang="de-AT" dirty="0"/>
+              <a:t>: []</a:t>
+            </a:r>
+          </a:p>
+          <a:p>
+            <a:r>
+              <a:rPr lang="de-AT" dirty="0" err="1"/>
+              <a:t>action</a:t>
+            </a:r>
+            <a:r>
+              <a:rPr lang="de-AT" dirty="0"/>
+              <a:t>:</a:t>
+            </a:r>
+          </a:p>
+          <a:p>
+            <a:r>
+              <a:rPr lang="de-AT" dirty="0"/>
+              <a:t>  - </a:t>
+            </a:r>
+            <a:r>
+              <a:rPr lang="de-AT" dirty="0" err="1"/>
+              <a:t>choose</a:t>
+            </a:r>
+            <a:r>
+              <a:rPr lang="de-AT" dirty="0"/>
+              <a:t>:</a:t>
+            </a:r>
+          </a:p>
+          <a:p>
+            <a:r>
+              <a:rPr lang="de-AT" dirty="0"/>
+              <a:t>      - </a:t>
+            </a:r>
+            <a:r>
+              <a:rPr lang="de-AT" dirty="0" err="1"/>
+              <a:t>conditions</a:t>
+            </a:r>
+            <a:r>
+              <a:rPr lang="de-AT" dirty="0"/>
+              <a:t>:</a:t>
+            </a:r>
+          </a:p>
+          <a:p>
+            <a:r>
+              <a:rPr lang="de-AT" dirty="0"/>
+              <a:t>          - </a:t>
+            </a:r>
+            <a:r>
+              <a:rPr lang="de-AT" dirty="0" err="1"/>
+              <a:t>condition</a:t>
+            </a:r>
+            <a:r>
+              <a:rPr lang="de-AT" dirty="0"/>
+              <a:t>: </a:t>
+            </a:r>
+            <a:r>
+              <a:rPr lang="de-AT" dirty="0" err="1"/>
+              <a:t>trigger</a:t>
+            </a:r>
+            <a:endParaRPr lang="de-AT" dirty="0"/>
+          </a:p>
+          <a:p>
+            <a:r>
+              <a:rPr lang="de-AT" dirty="0"/>
+              <a:t>            </a:t>
+            </a:r>
+            <a:r>
+              <a:rPr lang="de-AT" dirty="0" err="1"/>
+              <a:t>id</a:t>
+            </a:r>
+            <a:r>
+              <a:rPr lang="de-AT" dirty="0"/>
+              <a:t>:</a:t>
+            </a:r>
+          </a:p>
+          <a:p>
+            <a:r>
+              <a:rPr lang="de-AT" dirty="0"/>
+              <a:t>              - </a:t>
+            </a:r>
+            <a:r>
+              <a:rPr lang="de-AT" dirty="0" err="1"/>
+              <a:t>zeit_tablette_zu_nehmen</a:t>
+            </a:r>
+            <a:endParaRPr lang="de-AT" dirty="0"/>
+          </a:p>
+          <a:p>
+            <a:r>
+              <a:rPr lang="de-AT" dirty="0"/>
+              <a:t>        </a:t>
+            </a:r>
+            <a:r>
+              <a:rPr lang="de-AT" dirty="0" err="1"/>
+              <a:t>sequence</a:t>
+            </a:r>
+            <a:r>
+              <a:rPr lang="de-AT" dirty="0"/>
+              <a:t>:</a:t>
+            </a:r>
+          </a:p>
+          <a:p>
+            <a:r>
+              <a:rPr lang="de-AT" dirty="0"/>
+              <a:t>          - </a:t>
+            </a:r>
+            <a:r>
+              <a:rPr lang="de-AT" dirty="0" err="1"/>
+              <a:t>service</a:t>
+            </a:r>
+            <a:r>
+              <a:rPr lang="de-AT" dirty="0"/>
+              <a:t>: </a:t>
+            </a:r>
+            <a:r>
+              <a:rPr lang="de-AT" dirty="0" err="1"/>
+              <a:t>input_boolean.turn_off</a:t>
+            </a:r>
+            <a:endParaRPr lang="de-AT" dirty="0"/>
+          </a:p>
+          <a:p>
+            <a:r>
+              <a:rPr lang="de-AT" dirty="0"/>
+              <a:t>            </a:t>
+            </a:r>
+            <a:r>
+              <a:rPr lang="de-AT" dirty="0" err="1"/>
+              <a:t>metadata</a:t>
+            </a:r>
+            <a:r>
+              <a:rPr lang="de-AT" dirty="0"/>
+              <a:t>: {}</a:t>
+            </a:r>
+          </a:p>
+          <a:p>
+            <a:r>
+              <a:rPr lang="de-AT" dirty="0"/>
+              <a:t>            </a:t>
+            </a:r>
+            <a:r>
+              <a:rPr lang="de-AT" dirty="0" err="1"/>
+              <a:t>data</a:t>
+            </a:r>
+            <a:r>
+              <a:rPr lang="de-AT" dirty="0"/>
+              <a:t>: {}</a:t>
+            </a:r>
+          </a:p>
+          <a:p>
+            <a:r>
+              <a:rPr lang="de-AT" dirty="0"/>
+              <a:t>            </a:t>
+            </a:r>
+            <a:r>
+              <a:rPr lang="de-AT" dirty="0" err="1"/>
+              <a:t>target</a:t>
+            </a:r>
+            <a:r>
+              <a:rPr lang="de-AT" dirty="0"/>
+              <a:t>:</a:t>
+            </a:r>
+          </a:p>
+          <a:p>
+            <a:r>
+              <a:rPr lang="de-AT" dirty="0"/>
+              <a:t>              </a:t>
+            </a:r>
+            <a:r>
+              <a:rPr lang="de-AT" dirty="0" err="1"/>
+              <a:t>entity_id</a:t>
+            </a:r>
+            <a:r>
+              <a:rPr lang="de-AT" dirty="0"/>
+              <a:t>: </a:t>
+            </a:r>
+            <a:r>
+              <a:rPr lang="de-AT" dirty="0" err="1"/>
+              <a:t>input_boolean.tablette_genommen</a:t>
+            </a:r>
+            <a:endParaRPr lang="de-AT" dirty="0"/>
+          </a:p>
+          <a:p>
+            <a:r>
+              <a:rPr lang="de-AT" dirty="0"/>
+              <a:t>          - </a:t>
+            </a:r>
+            <a:r>
+              <a:rPr lang="de-AT" dirty="0" err="1"/>
+              <a:t>repeat</a:t>
+            </a:r>
+            <a:r>
+              <a:rPr lang="de-AT" dirty="0"/>
+              <a:t>:</a:t>
+            </a:r>
+          </a:p>
+          <a:p>
+            <a:r>
+              <a:rPr lang="de-AT" dirty="0"/>
+              <a:t>              </a:t>
+            </a:r>
+            <a:r>
+              <a:rPr lang="de-AT" dirty="0" err="1"/>
+              <a:t>sequence</a:t>
+            </a:r>
+            <a:r>
+              <a:rPr lang="de-AT" dirty="0"/>
+              <a:t>:</a:t>
+            </a:r>
+          </a:p>
+          <a:p>
+            <a:r>
+              <a:rPr lang="de-AT" dirty="0"/>
+              <a:t>                - </a:t>
+            </a:r>
+            <a:r>
+              <a:rPr lang="de-AT" dirty="0" err="1"/>
+              <a:t>service</a:t>
+            </a:r>
+            <a:r>
+              <a:rPr lang="de-AT" dirty="0"/>
+              <a:t>: </a:t>
+            </a:r>
+            <a:r>
+              <a:rPr lang="de-AT" dirty="0" err="1"/>
+              <a:t>notify.mobile_app_leos_handy</a:t>
+            </a:r>
+            <a:endParaRPr lang="de-AT" dirty="0"/>
+          </a:p>
+          <a:p>
+            <a:r>
+              <a:rPr lang="de-AT" dirty="0"/>
+              <a:t>                  </a:t>
+            </a:r>
+            <a:r>
+              <a:rPr lang="de-AT" dirty="0" err="1"/>
+              <a:t>data</a:t>
+            </a:r>
+            <a:r>
+              <a:rPr lang="de-AT" dirty="0"/>
+              <a:t>:</a:t>
+            </a:r>
+          </a:p>
+          <a:p>
+            <a:r>
+              <a:rPr lang="de-AT" dirty="0"/>
+              <a:t>                    </a:t>
+            </a:r>
+            <a:r>
+              <a:rPr lang="de-AT" dirty="0" err="1"/>
+              <a:t>message</a:t>
+            </a:r>
+            <a:r>
+              <a:rPr lang="de-AT" dirty="0"/>
+              <a:t>: Tablette nehmen</a:t>
+            </a:r>
+          </a:p>
+          <a:p>
+            <a:r>
+              <a:rPr lang="de-AT" dirty="0"/>
+              <a:t>                    title: Tablette</a:t>
+            </a:r>
+          </a:p>
+          <a:p>
+            <a:r>
+              <a:rPr lang="de-AT" dirty="0"/>
+              <a:t>                    </a:t>
+            </a:r>
+            <a:r>
+              <a:rPr lang="de-AT" dirty="0" err="1"/>
+              <a:t>data</a:t>
+            </a:r>
+            <a:r>
+              <a:rPr lang="de-AT" dirty="0"/>
+              <a:t>:</a:t>
+            </a:r>
+          </a:p>
+          <a:p>
+            <a:r>
+              <a:rPr lang="de-AT" dirty="0"/>
+              <a:t>                      </a:t>
+            </a:r>
+            <a:r>
+              <a:rPr lang="de-AT" dirty="0" err="1"/>
+              <a:t>actions</a:t>
+            </a:r>
+            <a:r>
+              <a:rPr lang="de-AT" dirty="0"/>
+              <a:t>:</a:t>
+            </a:r>
+          </a:p>
+          <a:p>
+            <a:r>
+              <a:rPr lang="de-AT" dirty="0"/>
+              <a:t>                        - </a:t>
+            </a:r>
+            <a:r>
+              <a:rPr lang="de-AT" dirty="0" err="1"/>
+              <a:t>action</a:t>
+            </a:r>
+            <a:r>
+              <a:rPr lang="de-AT" dirty="0"/>
+              <a:t>: TABLETTE_GENOMMEN</a:t>
+            </a:r>
+          </a:p>
+          <a:p>
+            <a:r>
+              <a:rPr lang="de-AT" dirty="0"/>
+              <a:t>                          title: Tablette genommen</a:t>
+            </a:r>
+          </a:p>
+          <a:p>
+            <a:r>
+              <a:rPr lang="de-AT" dirty="0"/>
+              <a:t>                - </a:t>
+            </a:r>
+            <a:r>
+              <a:rPr lang="de-AT" dirty="0" err="1"/>
+              <a:t>delay</a:t>
+            </a:r>
+            <a:r>
+              <a:rPr lang="de-AT" dirty="0"/>
+              <a:t>:</a:t>
+            </a:r>
+          </a:p>
+          <a:p>
+            <a:r>
+              <a:rPr lang="de-AT" dirty="0"/>
+              <a:t>                    </a:t>
+            </a:r>
+            <a:r>
+              <a:rPr lang="de-AT" dirty="0" err="1"/>
+              <a:t>hours</a:t>
+            </a:r>
+            <a:r>
+              <a:rPr lang="de-AT" dirty="0"/>
+              <a:t>: 0</a:t>
+            </a:r>
+          </a:p>
+          <a:p>
+            <a:r>
+              <a:rPr lang="de-AT" dirty="0"/>
+              <a:t>                    </a:t>
+            </a:r>
+            <a:r>
+              <a:rPr lang="de-AT" dirty="0" err="1"/>
+              <a:t>minutes</a:t>
+            </a:r>
+            <a:r>
+              <a:rPr lang="de-AT" dirty="0"/>
+              <a:t>: 10</a:t>
+            </a:r>
+          </a:p>
+          <a:p>
+            <a:r>
+              <a:rPr lang="de-AT" dirty="0"/>
+              <a:t>                    </a:t>
+            </a:r>
+            <a:r>
+              <a:rPr lang="de-AT" dirty="0" err="1"/>
+              <a:t>seconds</a:t>
+            </a:r>
+            <a:r>
+              <a:rPr lang="de-AT" dirty="0"/>
+              <a:t>: 0</a:t>
+            </a:r>
+          </a:p>
+          <a:p>
+            <a:r>
+              <a:rPr lang="de-AT" dirty="0"/>
+              <a:t>                    </a:t>
+            </a:r>
+            <a:r>
+              <a:rPr lang="de-AT" dirty="0" err="1"/>
+              <a:t>milliseconds</a:t>
+            </a:r>
+            <a:r>
+              <a:rPr lang="de-AT" dirty="0"/>
+              <a:t>: 0</a:t>
+            </a:r>
+          </a:p>
+          <a:p>
+            <a:r>
+              <a:rPr lang="de-AT" dirty="0"/>
+              <a:t>              </a:t>
+            </a:r>
+            <a:r>
+              <a:rPr lang="de-AT" dirty="0" err="1"/>
+              <a:t>until</a:t>
+            </a:r>
+            <a:r>
+              <a:rPr lang="de-AT" dirty="0"/>
+              <a:t>:</a:t>
+            </a:r>
+          </a:p>
+          <a:p>
+            <a:r>
+              <a:rPr lang="de-AT" dirty="0"/>
+              <a:t>                - </a:t>
+            </a:r>
+            <a:r>
+              <a:rPr lang="de-AT" dirty="0" err="1"/>
+              <a:t>condition</a:t>
+            </a:r>
+            <a:r>
+              <a:rPr lang="de-AT" dirty="0"/>
+              <a:t>: </a:t>
+            </a:r>
+            <a:r>
+              <a:rPr lang="de-AT" dirty="0" err="1"/>
+              <a:t>state</a:t>
+            </a:r>
+            <a:endParaRPr lang="de-AT" dirty="0"/>
+          </a:p>
+          <a:p>
+            <a:r>
+              <a:rPr lang="de-AT" dirty="0"/>
+              <a:t>                  </a:t>
+            </a:r>
+            <a:r>
+              <a:rPr lang="de-AT" dirty="0" err="1"/>
+              <a:t>entity_id</a:t>
+            </a:r>
+            <a:r>
+              <a:rPr lang="de-AT" dirty="0"/>
+              <a:t>: </a:t>
+            </a:r>
+            <a:r>
+              <a:rPr lang="de-AT" dirty="0" err="1"/>
+              <a:t>input_boolean.tablette_genommen</a:t>
+            </a:r>
+            <a:endParaRPr lang="de-AT" dirty="0"/>
+          </a:p>
+          <a:p>
+            <a:r>
+              <a:rPr lang="de-AT" dirty="0"/>
+              <a:t>                  </a:t>
+            </a:r>
+            <a:r>
+              <a:rPr lang="de-AT" dirty="0" err="1"/>
+              <a:t>state</a:t>
+            </a:r>
+            <a:r>
+              <a:rPr lang="de-AT" dirty="0"/>
+              <a:t>: "on"</a:t>
+            </a:r>
+          </a:p>
+          <a:p>
+            <a:r>
+              <a:rPr lang="de-AT" dirty="0"/>
+              <a:t>      - </a:t>
+            </a:r>
+            <a:r>
+              <a:rPr lang="de-AT" dirty="0" err="1"/>
+              <a:t>conditions</a:t>
+            </a:r>
+            <a:r>
+              <a:rPr lang="de-AT" dirty="0"/>
+              <a:t>:</a:t>
+            </a:r>
+          </a:p>
+          <a:p>
+            <a:r>
+              <a:rPr lang="de-AT" dirty="0"/>
+              <a:t>          - </a:t>
+            </a:r>
+            <a:r>
+              <a:rPr lang="de-AT" dirty="0" err="1"/>
+              <a:t>condition</a:t>
+            </a:r>
+            <a:r>
+              <a:rPr lang="de-AT" dirty="0"/>
+              <a:t>: </a:t>
+            </a:r>
+            <a:r>
+              <a:rPr lang="de-AT" dirty="0" err="1"/>
+              <a:t>trigger</a:t>
+            </a:r>
+            <a:endParaRPr lang="de-AT" dirty="0"/>
+          </a:p>
+          <a:p>
+            <a:r>
+              <a:rPr lang="de-AT" dirty="0"/>
+              <a:t>            </a:t>
+            </a:r>
+            <a:r>
+              <a:rPr lang="de-AT" dirty="0" err="1"/>
+              <a:t>id</a:t>
+            </a:r>
+            <a:r>
+              <a:rPr lang="de-AT" dirty="0"/>
+              <a:t>:</a:t>
+            </a:r>
+          </a:p>
+          <a:p>
+            <a:r>
+              <a:rPr lang="de-AT" dirty="0"/>
+              <a:t>              - </a:t>
+            </a:r>
+            <a:r>
+              <a:rPr lang="de-AT" dirty="0" err="1"/>
+              <a:t>tablette_wurde_genommen</a:t>
+            </a:r>
+            <a:endParaRPr lang="de-AT" dirty="0"/>
+          </a:p>
+          <a:p>
+            <a:r>
+              <a:rPr lang="de-AT" dirty="0"/>
+              <a:t>        </a:t>
+            </a:r>
+            <a:r>
+              <a:rPr lang="de-AT" dirty="0" err="1"/>
+              <a:t>sequence</a:t>
+            </a:r>
+            <a:r>
+              <a:rPr lang="de-AT" dirty="0"/>
+              <a:t>:</a:t>
+            </a:r>
+          </a:p>
+          <a:p>
+            <a:r>
+              <a:rPr lang="de-AT" dirty="0"/>
+              <a:t>          - </a:t>
+            </a:r>
+            <a:r>
+              <a:rPr lang="de-AT" dirty="0" err="1"/>
+              <a:t>service</a:t>
+            </a:r>
+            <a:r>
+              <a:rPr lang="de-AT" dirty="0"/>
+              <a:t>: </a:t>
+            </a:r>
+            <a:r>
+              <a:rPr lang="de-AT" dirty="0" err="1"/>
+              <a:t>input_boolean.turn_on</a:t>
+            </a:r>
+            <a:endParaRPr lang="de-AT" dirty="0"/>
+          </a:p>
+          <a:p>
+            <a:r>
+              <a:rPr lang="de-AT" dirty="0"/>
+              <a:t>            </a:t>
+            </a:r>
+            <a:r>
+              <a:rPr lang="de-AT" dirty="0" err="1"/>
+              <a:t>target</a:t>
+            </a:r>
+            <a:r>
+              <a:rPr lang="de-AT" dirty="0"/>
+              <a:t>:</a:t>
+            </a:r>
+          </a:p>
+          <a:p>
+            <a:r>
+              <a:rPr lang="de-AT" dirty="0"/>
+              <a:t>              </a:t>
+            </a:r>
+            <a:r>
+              <a:rPr lang="de-AT" dirty="0" err="1"/>
+              <a:t>entity_id</a:t>
+            </a:r>
+            <a:r>
+              <a:rPr lang="de-AT" dirty="0"/>
+              <a:t>: </a:t>
+            </a:r>
+            <a:r>
+              <a:rPr lang="de-AT" dirty="0" err="1"/>
+              <a:t>input_boolean.tablette_genommen</a:t>
+            </a:r>
+            <a:endParaRPr lang="de-AT" dirty="0"/>
+          </a:p>
+          <a:p>
+            <a:r>
+              <a:rPr lang="de-AT" dirty="0"/>
+              <a:t>            </a:t>
+            </a:r>
+            <a:r>
+              <a:rPr lang="de-AT" dirty="0" err="1"/>
+              <a:t>data</a:t>
+            </a:r>
+            <a:r>
+              <a:rPr lang="de-AT" dirty="0"/>
+              <a:t>: {}</a:t>
+            </a:r>
+          </a:p>
+          <a:p>
+            <a:r>
+              <a:rPr lang="de-AT" dirty="0" err="1"/>
+              <a:t>mode</a:t>
+            </a:r>
+            <a:r>
+              <a:rPr lang="de-AT" dirty="0"/>
+              <a:t>: parallel</a:t>
+            </a:r>
+          </a:p>
+          <a:p>
+            <a:endParaRPr lang="de-AT" dirty="0"/>
+          </a:p>
+        </p:txBody>
+      </p:sp>
+      <p:sp>
+        <p:nvSpPr>
+          <p:cNvPr id="4" name="Foliennummernplatzhalter 3"/>
+          <p:cNvSpPr>
+            <a:spLocks noGrp="1"/>
+          </p:cNvSpPr>
+          <p:nvPr>
+            <p:ph type="sldNum" sz="quarter" idx="5"/>
+          </p:nvPr>
+        </p:nvSpPr>
+        <p:spPr/>
+        <p:txBody>
+          <a:bodyPr/>
+          <a:lstStyle/>
+          <a:p>
+            <a:pPr>
+              <a:defRPr/>
+            </a:pPr>
+            <a:fld id="{46EAC6C9-0F3A-40E0-896B-88DE66496CB5}" type="slidenum">
+              <a:rPr lang="de-AT" smtClean="0"/>
+              <a:pPr>
+                <a:defRPr/>
+              </a:pPr>
+              <a:t>21</a:t>
             </a:fld>
             <a:endParaRPr lang="de-AT"/>
           </a:p>
@@ -3140,7 +3246,7 @@
           <p:cNvPr id="2" name="Titel 1">
             <a:extLst>
               <a:ext uri="{FF2B5EF4-FFF2-40B4-BE49-F238E27FC236}">
-                <a16:creationId xmlns:a16="http://schemas.microsoft.com/office/drawing/2014/main" id="{091E4159-D98D-0D06-D3D4-A4B1A4726948}"/>
+                <a16:creationId xmlns:a16="http://schemas.microsoft.com/office/drawing/2014/main" id="{D892DC7C-11DA-A211-9453-571646F788A9}"/>
               </a:ext>
             </a:extLst>
           </p:cNvPr>
@@ -3158,7 +3264,7 @@
           <a:p>
             <a:r>
               <a:rPr lang="de-AT" dirty="0"/>
-              <a:t>Automation muss mehrfach startbar sein</a:t>
+              <a:t>Gängige Werte für die Lautstärke</a:t>
             </a:r>
           </a:p>
         </p:txBody>
@@ -3168,7 +3274,7 @@
           <p:cNvPr id="3" name="Textplatzhalter 2">
             <a:extLst>
               <a:ext uri="{FF2B5EF4-FFF2-40B4-BE49-F238E27FC236}">
-                <a16:creationId xmlns:a16="http://schemas.microsoft.com/office/drawing/2014/main" id="{5EC25699-E81B-A9A8-47FC-77A15A88C7E0}"/>
+                <a16:creationId xmlns:a16="http://schemas.microsoft.com/office/drawing/2014/main" id="{8E976DE1-C45C-CD8E-0C5E-942A43AC1A3E}"/>
               </a:ext>
             </a:extLst>
           </p:cNvPr>
@@ -3184,10 +3290,7 @@
           <a:bodyPr/>
           <a:lstStyle/>
           <a:p>
-            <a:r>
-              <a:rPr lang="de-AT" dirty="0"/>
-              <a:t>Modus auf parallel ändern</a:t>
-            </a:r>
+            <a:endParaRPr lang="de-AT"/>
           </a:p>
         </p:txBody>
       </p:sp>
@@ -3196,7 +3299,7 @@
           <p:cNvPr id="5" name="Grafik 4">
             <a:extLst>
               <a:ext uri="{FF2B5EF4-FFF2-40B4-BE49-F238E27FC236}">
-                <a16:creationId xmlns:a16="http://schemas.microsoft.com/office/drawing/2014/main" id="{E9EFFA7C-20C7-1A51-C5FA-00274B979F5E}"/>
+                <a16:creationId xmlns:a16="http://schemas.microsoft.com/office/drawing/2014/main" id="{17F5A874-6B0D-92A2-7798-B0BC00A28E06}"/>
               </a:ext>
             </a:extLst>
           </p:cNvPr>
@@ -3213,8 +3316,8 @@
         </p:blipFill>
         <p:spPr>
           <a:xfrm>
-            <a:off x="0" y="1948480"/>
-            <a:ext cx="9144000" cy="1644118"/>
+            <a:off x="468312" y="1176622"/>
+            <a:ext cx="8180738" cy="4844665"/>
           </a:xfrm>
           <a:prstGeom prst="rect">
             <a:avLst/>
@@ -3224,7 +3327,7 @@
     </p:spTree>
     <p:extLst>
       <p:ext uri="{BB962C8B-B14F-4D97-AF65-F5344CB8AC3E}">
-        <p14:creationId xmlns:p14="http://schemas.microsoft.com/office/powerpoint/2010/main" val="4160334688"/>
+        <p14:creationId xmlns:p14="http://schemas.microsoft.com/office/powerpoint/2010/main" val="3752899323"/>
       </p:ext>
     </p:extLst>
   </p:cSld>
@@ -3256,7 +3359,7 @@
           <p:cNvPr id="2" name="Titel 1">
             <a:extLst>
               <a:ext uri="{FF2B5EF4-FFF2-40B4-BE49-F238E27FC236}">
-                <a16:creationId xmlns:a16="http://schemas.microsoft.com/office/drawing/2014/main" id="{7208E9D6-232A-933C-22DC-BE51140EDDEB}"/>
+                <a16:creationId xmlns:a16="http://schemas.microsoft.com/office/drawing/2014/main" id="{8AC32E1F-2032-20E5-0678-11FF48C96CF5}"/>
               </a:ext>
             </a:extLst>
           </p:cNvPr>
@@ -3274,8 +3377,13 @@
           <a:p>
             <a:r>
               <a:rPr lang="de-AT" dirty="0"/>
-              <a:t>Trace mit Aufforderung</a:t>
-            </a:r>
+              <a:t>Werte für </a:t>
+            </a:r>
+            <a:r>
+              <a:rPr lang="de-AT" dirty="0" err="1"/>
+              <a:t>Priority</a:t>
+            </a:r>
+            <a:endParaRPr lang="de-AT" dirty="0"/>
           </a:p>
         </p:txBody>
       </p:sp>
@@ -3284,7 +3392,7 @@
           <p:cNvPr id="3" name="Textplatzhalter 2">
             <a:extLst>
               <a:ext uri="{FF2B5EF4-FFF2-40B4-BE49-F238E27FC236}">
-                <a16:creationId xmlns:a16="http://schemas.microsoft.com/office/drawing/2014/main" id="{F2AB4162-FBC3-B8FF-0330-884E0FC51D25}"/>
+                <a16:creationId xmlns:a16="http://schemas.microsoft.com/office/drawing/2014/main" id="{AF42743C-0C9F-34A6-4CC3-396864D300A4}"/>
               </a:ext>
             </a:extLst>
           </p:cNvPr>
@@ -3300,7 +3408,17 @@
           <a:bodyPr/>
           <a:lstStyle/>
           <a:p>
-            <a:endParaRPr lang="de-AT"/>
+            <a:r>
+              <a:rPr lang="de-AT" dirty="0"/>
+              <a:t>Max wirkt ähnlich einem Wecker</a:t>
+            </a:r>
+          </a:p>
+          <a:p>
+            <a:pPr lvl="1"/>
+            <a:r>
+              <a:rPr lang="de-AT" dirty="0"/>
+              <a:t>Abhängig von den Berechtigungen am Handy</a:t>
+            </a:r>
           </a:p>
         </p:txBody>
       </p:sp>
@@ -3309,7 +3427,7 @@
           <p:cNvPr id="5" name="Grafik 4">
             <a:extLst>
               <a:ext uri="{FF2B5EF4-FFF2-40B4-BE49-F238E27FC236}">
-                <a16:creationId xmlns:a16="http://schemas.microsoft.com/office/drawing/2014/main" id="{3FC50A35-16FF-26A4-6339-BB37F0B3049F}"/>
+                <a16:creationId xmlns:a16="http://schemas.microsoft.com/office/drawing/2014/main" id="{63DD2767-F0B5-5EA2-AB6E-D90C72BC1E58}"/>
               </a:ext>
             </a:extLst>
           </p:cNvPr>
@@ -3326,8 +3444,8 @@
         </p:blipFill>
         <p:spPr>
           <a:xfrm>
-            <a:off x="1691680" y="1155063"/>
-            <a:ext cx="5981801" cy="5577524"/>
+            <a:off x="56636" y="2348880"/>
+            <a:ext cx="9030728" cy="3115791"/>
           </a:xfrm>
           <a:prstGeom prst="rect">
             <a:avLst/>
@@ -3337,7 +3455,7 @@
     </p:spTree>
     <p:extLst>
       <p:ext uri="{BB962C8B-B14F-4D97-AF65-F5344CB8AC3E}">
-        <p14:creationId xmlns:p14="http://schemas.microsoft.com/office/powerpoint/2010/main" val="1645972749"/>
+        <p14:creationId xmlns:p14="http://schemas.microsoft.com/office/powerpoint/2010/main" val="2957530752"/>
       </p:ext>
     </p:extLst>
   </p:cSld>
@@ -3369,7 +3487,7 @@
           <p:cNvPr id="2" name="Titel 1">
             <a:extLst>
               <a:ext uri="{FF2B5EF4-FFF2-40B4-BE49-F238E27FC236}">
-                <a16:creationId xmlns:a16="http://schemas.microsoft.com/office/drawing/2014/main" id="{C59EEA7D-2B4D-A651-6CB9-DFF66C625F3F}"/>
+                <a16:creationId xmlns:a16="http://schemas.microsoft.com/office/drawing/2014/main" id="{826B2406-0E8E-71E0-F0C4-2A029EA929F5}"/>
               </a:ext>
             </a:extLst>
           </p:cNvPr>
@@ -3385,10 +3503,7 @@
           <a:bodyPr/>
           <a:lstStyle/>
           <a:p>
-            <a:r>
-              <a:rPr lang="de-AT" dirty="0"/>
-              <a:t>Bestätigung durch Handy</a:t>
-            </a:r>
+            <a:endParaRPr lang="de-AT"/>
           </a:p>
         </p:txBody>
       </p:sp>
@@ -3397,7 +3512,7 @@
           <p:cNvPr id="3" name="Textplatzhalter 2">
             <a:extLst>
               <a:ext uri="{FF2B5EF4-FFF2-40B4-BE49-F238E27FC236}">
-                <a16:creationId xmlns:a16="http://schemas.microsoft.com/office/drawing/2014/main" id="{56245907-2E0B-9053-D5F9-0DB24AD9C832}"/>
+                <a16:creationId xmlns:a16="http://schemas.microsoft.com/office/drawing/2014/main" id="{FB11BFAA-0C33-02E0-3FA4-F96F8A595B3F}"/>
               </a:ext>
             </a:extLst>
           </p:cNvPr>
@@ -3417,40 +3532,10 @@
           </a:p>
         </p:txBody>
       </p:sp>
-      <p:pic>
-        <p:nvPicPr>
-          <p:cNvPr id="5" name="Grafik 4">
-            <a:extLst>
-              <a:ext uri="{FF2B5EF4-FFF2-40B4-BE49-F238E27FC236}">
-                <a16:creationId xmlns:a16="http://schemas.microsoft.com/office/drawing/2014/main" id="{4A555869-60B1-264F-A3AA-59292BDE5C98}"/>
-              </a:ext>
-            </a:extLst>
-          </p:cNvPr>
-          <p:cNvPicPr>
-            <a:picLocks noChangeAspect="1"/>
-          </p:cNvPicPr>
-          <p:nvPr/>
-        </p:nvPicPr>
-        <p:blipFill>
-          <a:blip r:embed="rId2"/>
-          <a:stretch>
-            <a:fillRect/>
-          </a:stretch>
-        </p:blipFill>
-        <p:spPr>
-          <a:xfrm>
-            <a:off x="1552210" y="995564"/>
-            <a:ext cx="6039580" cy="5544290"/>
-          </a:xfrm>
-          <a:prstGeom prst="rect">
-            <a:avLst/>
-          </a:prstGeom>
-        </p:spPr>
-      </p:pic>
     </p:spTree>
     <p:extLst>
       <p:ext uri="{BB962C8B-B14F-4D97-AF65-F5344CB8AC3E}">
-        <p14:creationId xmlns:p14="http://schemas.microsoft.com/office/powerpoint/2010/main" val="3864918587"/>
+        <p14:creationId xmlns:p14="http://schemas.microsoft.com/office/powerpoint/2010/main" val="422563159"/>
       </p:ext>
     </p:extLst>
   </p:cSld>
@@ -3461,568 +3546,6 @@
 </file>
 
 <file path=ppt/slides/slide13.xml><?xml version="1.0" encoding="utf-8"?>
-<p:sld xmlns:a="http://schemas.openxmlformats.org/drawingml/2006/main" xmlns:r="http://schemas.openxmlformats.org/officeDocument/2006/relationships" xmlns:p="http://schemas.openxmlformats.org/presentationml/2006/main">
-  <p:cSld>
-    <p:spTree>
-      <p:nvGrpSpPr>
-        <p:cNvPr id="1" name=""/>
-        <p:cNvGrpSpPr/>
-        <p:nvPr/>
-      </p:nvGrpSpPr>
-      <p:grpSpPr>
-        <a:xfrm>
-          <a:off x="0" y="0"/>
-          <a:ext cx="0" cy="0"/>
-          <a:chOff x="0" y="0"/>
-          <a:chExt cx="0" cy="0"/>
-        </a:xfrm>
-      </p:grpSpPr>
-      <p:sp>
-        <p:nvSpPr>
-          <p:cNvPr id="2" name="Titel 1">
-            <a:extLst>
-              <a:ext uri="{FF2B5EF4-FFF2-40B4-BE49-F238E27FC236}">
-                <a16:creationId xmlns:a16="http://schemas.microsoft.com/office/drawing/2014/main" id="{1FA64F8B-58AF-4B3E-3CD6-FACB4A7C909A}"/>
-              </a:ext>
-            </a:extLst>
-          </p:cNvPr>
-          <p:cNvSpPr>
-            <a:spLocks noGrp="1"/>
-          </p:cNvSpPr>
-          <p:nvPr>
-            <p:ph type="title"/>
-          </p:nvPr>
-        </p:nvSpPr>
-        <p:spPr/>
-        <p:txBody>
-          <a:bodyPr/>
-          <a:lstStyle/>
-          <a:p>
-            <a:r>
-              <a:rPr lang="de-AT" dirty="0" err="1"/>
-              <a:t>Yaml</a:t>
-            </a:r>
-            <a:r>
-              <a:rPr lang="de-AT" dirty="0"/>
-              <a:t>-Code</a:t>
-            </a:r>
-          </a:p>
-        </p:txBody>
-      </p:sp>
-      <p:sp>
-        <p:nvSpPr>
-          <p:cNvPr id="3" name="Textplatzhalter 2">
-            <a:extLst>
-              <a:ext uri="{FF2B5EF4-FFF2-40B4-BE49-F238E27FC236}">
-                <a16:creationId xmlns:a16="http://schemas.microsoft.com/office/drawing/2014/main" id="{8E59B9E7-CC9D-F765-F4D9-BA2A475B38BC}"/>
-              </a:ext>
-            </a:extLst>
-          </p:cNvPr>
-          <p:cNvSpPr>
-            <a:spLocks noGrp="1"/>
-          </p:cNvSpPr>
-          <p:nvPr>
-            <p:ph type="body" sz="quarter" idx="10"/>
-          </p:nvPr>
-        </p:nvSpPr>
-        <p:spPr/>
-        <p:txBody>
-          <a:bodyPr/>
-          <a:lstStyle/>
-          <a:p>
-            <a:endParaRPr lang="de-AT" dirty="0"/>
-          </a:p>
-        </p:txBody>
-      </p:sp>
-      <p:pic>
-        <p:nvPicPr>
-          <p:cNvPr id="5" name="Grafik 4">
-            <a:extLst>
-              <a:ext uri="{FF2B5EF4-FFF2-40B4-BE49-F238E27FC236}">
-                <a16:creationId xmlns:a16="http://schemas.microsoft.com/office/drawing/2014/main" id="{A4BED1FE-D63A-63B6-8591-920580CC99D1}"/>
-              </a:ext>
-            </a:extLst>
-          </p:cNvPr>
-          <p:cNvPicPr>
-            <a:picLocks noChangeAspect="1"/>
-          </p:cNvPicPr>
-          <p:nvPr/>
-        </p:nvPicPr>
-        <p:blipFill>
-          <a:blip r:embed="rId3"/>
-          <a:stretch>
-            <a:fillRect/>
-          </a:stretch>
-        </p:blipFill>
-        <p:spPr>
-          <a:xfrm>
-            <a:off x="1794664" y="908720"/>
-            <a:ext cx="5554671" cy="5732854"/>
-          </a:xfrm>
-          <a:prstGeom prst="rect">
-            <a:avLst/>
-          </a:prstGeom>
-        </p:spPr>
-      </p:pic>
-    </p:spTree>
-    <p:extLst>
-      <p:ext uri="{BB962C8B-B14F-4D97-AF65-F5344CB8AC3E}">
-        <p14:creationId xmlns:p14="http://schemas.microsoft.com/office/powerpoint/2010/main" val="377221077"/>
-      </p:ext>
-    </p:extLst>
-  </p:cSld>
-  <p:clrMapOvr>
-    <a:masterClrMapping/>
-  </p:clrMapOvr>
-</p:sld>
-</file>
-
-<file path=ppt/slides/slide2.xml><?xml version="1.0" encoding="utf-8"?>
-<p:sld xmlns:a="http://schemas.openxmlformats.org/drawingml/2006/main" xmlns:r="http://schemas.openxmlformats.org/officeDocument/2006/relationships" xmlns:p="http://schemas.openxmlformats.org/presentationml/2006/main">
-  <p:cSld>
-    <p:spTree>
-      <p:nvGrpSpPr>
-        <p:cNvPr id="1" name=""/>
-        <p:cNvGrpSpPr/>
-        <p:nvPr/>
-      </p:nvGrpSpPr>
-      <p:grpSpPr>
-        <a:xfrm>
-          <a:off x="0" y="0"/>
-          <a:ext cx="0" cy="0"/>
-          <a:chOff x="0" y="0"/>
-          <a:chExt cx="0" cy="0"/>
-        </a:xfrm>
-      </p:grpSpPr>
-      <p:sp>
-        <p:nvSpPr>
-          <p:cNvPr id="2" name="Titel 1">
-            <a:extLst>
-              <a:ext uri="{FF2B5EF4-FFF2-40B4-BE49-F238E27FC236}">
-                <a16:creationId xmlns:a16="http://schemas.microsoft.com/office/drawing/2014/main" id="{B3430DC3-E7D5-9EF7-A4D0-C937287A57FB}"/>
-              </a:ext>
-            </a:extLst>
-          </p:cNvPr>
-          <p:cNvSpPr>
-            <a:spLocks noGrp="1"/>
-          </p:cNvSpPr>
-          <p:nvPr>
-            <p:ph type="title"/>
-          </p:nvPr>
-        </p:nvSpPr>
-        <p:spPr/>
-        <p:txBody>
-          <a:bodyPr/>
-          <a:lstStyle/>
-          <a:p>
-            <a:r>
-              <a:rPr lang="de-AT" dirty="0"/>
-              <a:t>Erster Test</a:t>
-            </a:r>
-          </a:p>
-        </p:txBody>
-      </p:sp>
-      <p:sp>
-        <p:nvSpPr>
-          <p:cNvPr id="3" name="Textplatzhalter 2">
-            <a:extLst>
-              <a:ext uri="{FF2B5EF4-FFF2-40B4-BE49-F238E27FC236}">
-                <a16:creationId xmlns:a16="http://schemas.microsoft.com/office/drawing/2014/main" id="{C88B958F-ADAF-CBC8-AEB3-86B9EDF27DCE}"/>
-              </a:ext>
-            </a:extLst>
-          </p:cNvPr>
-          <p:cNvSpPr>
-            <a:spLocks noGrp="1"/>
-          </p:cNvSpPr>
-          <p:nvPr>
-            <p:ph type="body" sz="quarter" idx="10"/>
-          </p:nvPr>
-        </p:nvSpPr>
-        <p:spPr/>
-        <p:txBody>
-          <a:bodyPr/>
-          <a:lstStyle/>
-          <a:p>
-            <a:endParaRPr lang="de-AT"/>
-          </a:p>
-        </p:txBody>
-      </p:sp>
-      <p:pic>
-        <p:nvPicPr>
-          <p:cNvPr id="5" name="Grafik 4">
-            <a:extLst>
-              <a:ext uri="{FF2B5EF4-FFF2-40B4-BE49-F238E27FC236}">
-                <a16:creationId xmlns:a16="http://schemas.microsoft.com/office/drawing/2014/main" id="{C2AAFDD0-CD89-9911-AAF9-2DDC34268D8E}"/>
-              </a:ext>
-            </a:extLst>
-          </p:cNvPr>
-          <p:cNvPicPr>
-            <a:picLocks noChangeAspect="1"/>
-          </p:cNvPicPr>
-          <p:nvPr/>
-        </p:nvPicPr>
-        <p:blipFill>
-          <a:blip r:embed="rId2"/>
-          <a:stretch>
-            <a:fillRect/>
-          </a:stretch>
-        </p:blipFill>
-        <p:spPr>
-          <a:xfrm>
-            <a:off x="180975" y="1857375"/>
-            <a:ext cx="8782050" cy="3143250"/>
-          </a:xfrm>
-          <a:prstGeom prst="rect">
-            <a:avLst/>
-          </a:prstGeom>
-        </p:spPr>
-      </p:pic>
-    </p:spTree>
-    <p:extLst>
-      <p:ext uri="{BB962C8B-B14F-4D97-AF65-F5344CB8AC3E}">
-        <p14:creationId xmlns:p14="http://schemas.microsoft.com/office/powerpoint/2010/main" val="314570025"/>
-      </p:ext>
-    </p:extLst>
-  </p:cSld>
-  <p:clrMapOvr>
-    <a:masterClrMapping/>
-  </p:clrMapOvr>
-</p:sld>
-</file>
-
-<file path=ppt/slides/slide3.xml><?xml version="1.0" encoding="utf-8"?>
-<p:sld xmlns:a="http://schemas.openxmlformats.org/drawingml/2006/main" xmlns:r="http://schemas.openxmlformats.org/officeDocument/2006/relationships" xmlns:p="http://schemas.openxmlformats.org/presentationml/2006/main">
-  <p:cSld>
-    <p:spTree>
-      <p:nvGrpSpPr>
-        <p:cNvPr id="1" name=""/>
-        <p:cNvGrpSpPr/>
-        <p:nvPr/>
-      </p:nvGrpSpPr>
-      <p:grpSpPr>
-        <a:xfrm>
-          <a:off x="0" y="0"/>
-          <a:ext cx="0" cy="0"/>
-          <a:chOff x="0" y="0"/>
-          <a:chExt cx="0" cy="0"/>
-        </a:xfrm>
-      </p:grpSpPr>
-      <p:sp>
-        <p:nvSpPr>
-          <p:cNvPr id="2" name="Titel 1">
-            <a:extLst>
-              <a:ext uri="{FF2B5EF4-FFF2-40B4-BE49-F238E27FC236}">
-                <a16:creationId xmlns:a16="http://schemas.microsoft.com/office/drawing/2014/main" id="{F548C1CE-A164-80A5-2002-84FEDDBF7C34}"/>
-              </a:ext>
-            </a:extLst>
-          </p:cNvPr>
-          <p:cNvSpPr>
-            <a:spLocks noGrp="1"/>
-          </p:cNvSpPr>
-          <p:nvPr>
-            <p:ph type="title"/>
-          </p:nvPr>
-        </p:nvSpPr>
-        <p:spPr/>
-        <p:txBody>
-          <a:bodyPr/>
-          <a:lstStyle/>
-          <a:p>
-            <a:r>
-              <a:rPr lang="de-AT" dirty="0"/>
-              <a:t>Text verschicken</a:t>
-            </a:r>
-          </a:p>
-        </p:txBody>
-      </p:sp>
-      <p:sp>
-        <p:nvSpPr>
-          <p:cNvPr id="3" name="Textplatzhalter 2">
-            <a:extLst>
-              <a:ext uri="{FF2B5EF4-FFF2-40B4-BE49-F238E27FC236}">
-                <a16:creationId xmlns:a16="http://schemas.microsoft.com/office/drawing/2014/main" id="{B9813C55-BB68-42DB-9436-58FE19EFE441}"/>
-              </a:ext>
-            </a:extLst>
-          </p:cNvPr>
-          <p:cNvSpPr>
-            <a:spLocks noGrp="1"/>
-          </p:cNvSpPr>
-          <p:nvPr>
-            <p:ph type="body" sz="quarter" idx="10"/>
-          </p:nvPr>
-        </p:nvSpPr>
-        <p:spPr/>
-        <p:txBody>
-          <a:bodyPr/>
-          <a:lstStyle/>
-          <a:p>
-            <a:endParaRPr lang="de-AT"/>
-          </a:p>
-        </p:txBody>
-      </p:sp>
-      <p:pic>
-        <p:nvPicPr>
-          <p:cNvPr id="5" name="Grafik 4">
-            <a:extLst>
-              <a:ext uri="{FF2B5EF4-FFF2-40B4-BE49-F238E27FC236}">
-                <a16:creationId xmlns:a16="http://schemas.microsoft.com/office/drawing/2014/main" id="{5E050AF9-666F-807F-2A40-4FD19C78FA9F}"/>
-              </a:ext>
-            </a:extLst>
-          </p:cNvPr>
-          <p:cNvPicPr>
-            <a:picLocks noChangeAspect="1"/>
-          </p:cNvPicPr>
-          <p:nvPr/>
-        </p:nvPicPr>
-        <p:blipFill>
-          <a:blip r:embed="rId2"/>
-          <a:stretch>
-            <a:fillRect/>
-          </a:stretch>
-        </p:blipFill>
-        <p:spPr>
-          <a:xfrm>
-            <a:off x="179512" y="981075"/>
-            <a:ext cx="7727776" cy="4346874"/>
-          </a:xfrm>
-          <a:prstGeom prst="rect">
-            <a:avLst/>
-          </a:prstGeom>
-        </p:spPr>
-      </p:pic>
-      <p:pic>
-        <p:nvPicPr>
-          <p:cNvPr id="7" name="Grafik 6">
-            <a:extLst>
-              <a:ext uri="{FF2B5EF4-FFF2-40B4-BE49-F238E27FC236}">
-                <a16:creationId xmlns:a16="http://schemas.microsoft.com/office/drawing/2014/main" id="{D8D919BF-181D-E0F6-2222-023B80EE6ECE}"/>
-              </a:ext>
-            </a:extLst>
-          </p:cNvPr>
-          <p:cNvPicPr>
-            <a:picLocks noChangeAspect="1"/>
-          </p:cNvPicPr>
-          <p:nvPr/>
-        </p:nvPicPr>
-        <p:blipFill>
-          <a:blip r:embed="rId3"/>
-          <a:stretch>
-            <a:fillRect/>
-          </a:stretch>
-        </p:blipFill>
-        <p:spPr>
-          <a:xfrm>
-            <a:off x="5821238" y="4438650"/>
-            <a:ext cx="3143250" cy="2419350"/>
-          </a:xfrm>
-          <a:prstGeom prst="rect">
-            <a:avLst/>
-          </a:prstGeom>
-        </p:spPr>
-      </p:pic>
-    </p:spTree>
-    <p:extLst>
-      <p:ext uri="{BB962C8B-B14F-4D97-AF65-F5344CB8AC3E}">
-        <p14:creationId xmlns:p14="http://schemas.microsoft.com/office/powerpoint/2010/main" val="852513930"/>
-      </p:ext>
-    </p:extLst>
-  </p:cSld>
-  <p:clrMapOvr>
-    <a:masterClrMapping/>
-  </p:clrMapOvr>
-</p:sld>
-</file>
-
-<file path=ppt/slides/slide4.xml><?xml version="1.0" encoding="utf-8"?>
-<p:sld xmlns:a="http://schemas.openxmlformats.org/drawingml/2006/main" xmlns:r="http://schemas.openxmlformats.org/officeDocument/2006/relationships" xmlns:p="http://schemas.openxmlformats.org/presentationml/2006/main">
-  <p:cSld>
-    <p:spTree>
-      <p:nvGrpSpPr>
-        <p:cNvPr id="1" name=""/>
-        <p:cNvGrpSpPr/>
-        <p:nvPr/>
-      </p:nvGrpSpPr>
-      <p:grpSpPr>
-        <a:xfrm>
-          <a:off x="0" y="0"/>
-          <a:ext cx="0" cy="0"/>
-          <a:chOff x="0" y="0"/>
-          <a:chExt cx="0" cy="0"/>
-        </a:xfrm>
-      </p:grpSpPr>
-      <p:sp>
-        <p:nvSpPr>
-          <p:cNvPr id="2" name="Titel 1">
-            <a:extLst>
-              <a:ext uri="{FF2B5EF4-FFF2-40B4-BE49-F238E27FC236}">
-                <a16:creationId xmlns:a16="http://schemas.microsoft.com/office/drawing/2014/main" id="{A006F92C-1C28-D456-8765-5C23559497D5}"/>
-              </a:ext>
-            </a:extLst>
-          </p:cNvPr>
-          <p:cNvSpPr>
-            <a:spLocks noGrp="1"/>
-          </p:cNvSpPr>
-          <p:nvPr>
-            <p:ph type="title"/>
-          </p:nvPr>
-        </p:nvSpPr>
-        <p:spPr/>
-        <p:txBody>
-          <a:bodyPr/>
-          <a:lstStyle/>
-          <a:p>
-            <a:r>
-              <a:rPr lang="de-AT" dirty="0" err="1"/>
-              <a:t>Actionable</a:t>
-            </a:r>
-            <a:r>
-              <a:rPr lang="de-AT" dirty="0"/>
-              <a:t> </a:t>
-            </a:r>
-            <a:r>
-              <a:rPr lang="de-AT" dirty="0" err="1"/>
-              <a:t>Notifications</a:t>
-            </a:r>
-            <a:endParaRPr lang="de-AT" dirty="0"/>
-          </a:p>
-        </p:txBody>
-      </p:sp>
-      <p:sp>
-        <p:nvSpPr>
-          <p:cNvPr id="3" name="Textplatzhalter 2">
-            <a:extLst>
-              <a:ext uri="{FF2B5EF4-FFF2-40B4-BE49-F238E27FC236}">
-                <a16:creationId xmlns:a16="http://schemas.microsoft.com/office/drawing/2014/main" id="{54AD6D78-600C-F92B-94CB-08E170F2CC69}"/>
-              </a:ext>
-            </a:extLst>
-          </p:cNvPr>
-          <p:cNvSpPr>
-            <a:spLocks noGrp="1"/>
-          </p:cNvSpPr>
-          <p:nvPr>
-            <p:ph type="body" sz="quarter" idx="10"/>
-          </p:nvPr>
-        </p:nvSpPr>
-        <p:spPr/>
-        <p:txBody>
-          <a:bodyPr/>
-          <a:lstStyle/>
-          <a:p>
-            <a:r>
-              <a:rPr lang="de-AT" dirty="0" err="1"/>
-              <a:t>Notification</a:t>
-            </a:r>
-            <a:r>
-              <a:rPr lang="de-AT" dirty="0"/>
-              <a:t> enthält Button</a:t>
-            </a:r>
-          </a:p>
-          <a:p>
-            <a:pPr lvl="1"/>
-            <a:r>
-              <a:rPr lang="de-AT" dirty="0"/>
-              <a:t>Press kann Action auf HA ausführen</a:t>
-            </a:r>
-          </a:p>
-          <a:p>
-            <a:pPr lvl="1"/>
-            <a:r>
-              <a:rPr lang="de-AT" dirty="0"/>
-              <a:t>URI:  navigiert direkt zu einem Dashboard</a:t>
-            </a:r>
-          </a:p>
-          <a:p>
-            <a:pPr lvl="2"/>
-            <a:r>
-              <a:rPr lang="de-AT" dirty="0"/>
-              <a:t>Beispiel: Zone Shop </a:t>
-            </a:r>
-            <a:r>
-              <a:rPr lang="de-AT" dirty="0" err="1"/>
-              <a:t>entered</a:t>
-            </a:r>
-            <a:r>
-              <a:rPr lang="de-AT" dirty="0"/>
-              <a:t> </a:t>
-            </a:r>
-            <a:r>
-              <a:rPr lang="de-AT" dirty="0">
-                <a:sym typeface="Wingdings" panose="05000000000000000000" pitchFamily="2" charset="2"/>
-              </a:rPr>
-              <a:t> open shopping-list</a:t>
-            </a:r>
-          </a:p>
-          <a:p>
-            <a:pPr lvl="1"/>
-            <a:r>
-              <a:rPr lang="de-AT" dirty="0">
-                <a:sym typeface="Wingdings" panose="05000000000000000000" pitchFamily="2" charset="2"/>
-              </a:rPr>
-              <a:t>Ausführung einer Automation</a:t>
-            </a:r>
-          </a:p>
-          <a:p>
-            <a:pPr lvl="2"/>
-            <a:r>
-              <a:rPr lang="de-AT" dirty="0">
-                <a:sym typeface="Wingdings" panose="05000000000000000000" pitchFamily="2" charset="2"/>
-              </a:rPr>
-              <a:t>Beispiel: Zone Home  open </a:t>
-            </a:r>
-            <a:r>
-              <a:rPr lang="de-AT" dirty="0" err="1">
-                <a:sym typeface="Wingdings" panose="05000000000000000000" pitchFamily="2" charset="2"/>
-              </a:rPr>
-              <a:t>garage</a:t>
-            </a:r>
-            <a:endParaRPr lang="de-AT" dirty="0"/>
-          </a:p>
-        </p:txBody>
-      </p:sp>
-      <p:pic>
-        <p:nvPicPr>
-          <p:cNvPr id="5" name="Grafik 4">
-            <a:extLst>
-              <a:ext uri="{FF2B5EF4-FFF2-40B4-BE49-F238E27FC236}">
-                <a16:creationId xmlns:a16="http://schemas.microsoft.com/office/drawing/2014/main" id="{CB0B37AD-EFA0-3142-7885-BD6D86DA1280}"/>
-              </a:ext>
-            </a:extLst>
-          </p:cNvPr>
-          <p:cNvPicPr>
-            <a:picLocks noChangeAspect="1"/>
-          </p:cNvPicPr>
-          <p:nvPr/>
-        </p:nvPicPr>
-        <p:blipFill>
-          <a:blip r:embed="rId2"/>
-          <a:stretch>
-            <a:fillRect/>
-          </a:stretch>
-        </p:blipFill>
-        <p:spPr>
-          <a:xfrm>
-            <a:off x="560928" y="4149080"/>
-            <a:ext cx="8022143" cy="2063744"/>
-          </a:xfrm>
-          <a:prstGeom prst="rect">
-            <a:avLst/>
-          </a:prstGeom>
-        </p:spPr>
-      </p:pic>
-    </p:spTree>
-    <p:extLst>
-      <p:ext uri="{BB962C8B-B14F-4D97-AF65-F5344CB8AC3E}">
-        <p14:creationId xmlns:p14="http://schemas.microsoft.com/office/powerpoint/2010/main" val="1444999320"/>
-      </p:ext>
-    </p:extLst>
-  </p:cSld>
-  <p:clrMapOvr>
-    <a:masterClrMapping/>
-  </p:clrMapOvr>
-</p:sld>
-</file>
-
-<file path=ppt/slides/slide5.xml><?xml version="1.0" encoding="utf-8"?>
 <p:sld xmlns:a="http://schemas.openxmlformats.org/drawingml/2006/main" xmlns:r="http://schemas.openxmlformats.org/officeDocument/2006/relationships" xmlns:p="http://schemas.openxmlformats.org/presentationml/2006/main">
   <p:cSld>
     <p:spTree>
@@ -4331,7 +3854,7 @@
 </p:sld>
 </file>
 
-<file path=ppt/slides/slide6.xml><?xml version="1.0" encoding="utf-8"?>
+<file path=ppt/slides/slide14.xml><?xml version="1.0" encoding="utf-8"?>
 <p:sld xmlns:a="http://schemas.openxmlformats.org/drawingml/2006/main" xmlns:r="http://schemas.openxmlformats.org/officeDocument/2006/relationships" xmlns:p="http://schemas.openxmlformats.org/presentationml/2006/main">
   <p:cSld>
     <p:spTree>
@@ -4460,7 +3983,7 @@
 </p:sld>
 </file>
 
-<file path=ppt/slides/slide7.xml><?xml version="1.0" encoding="utf-8"?>
+<file path=ppt/slides/slide15.xml><?xml version="1.0" encoding="utf-8"?>
 <p:sld xmlns:a="http://schemas.openxmlformats.org/drawingml/2006/main" xmlns:r="http://schemas.openxmlformats.org/officeDocument/2006/relationships" xmlns:p="http://schemas.openxmlformats.org/presentationml/2006/main">
   <p:cSld>
     <p:spTree>
@@ -4576,7 +4099,7 @@
 </p:sld>
 </file>
 
-<file path=ppt/slides/slide8.xml><?xml version="1.0" encoding="utf-8"?>
+<file path=ppt/slides/slide16.xml><?xml version="1.0" encoding="utf-8"?>
 <p:sld xmlns:a="http://schemas.openxmlformats.org/drawingml/2006/main" xmlns:r="http://schemas.openxmlformats.org/officeDocument/2006/relationships" xmlns:p="http://schemas.openxmlformats.org/presentationml/2006/main">
   <p:cSld>
     <p:spTree>
@@ -4689,7 +4212,7 @@
 </p:sld>
 </file>
 
-<file path=ppt/slides/slide9.xml><?xml version="1.0" encoding="utf-8"?>
+<file path=ppt/slides/slide17.xml><?xml version="1.0" encoding="utf-8"?>
 <p:sld xmlns:a="http://schemas.openxmlformats.org/drawingml/2006/main" xmlns:r="http://schemas.openxmlformats.org/officeDocument/2006/relationships" xmlns:p="http://schemas.openxmlformats.org/presentationml/2006/main">
   <p:cSld>
     <p:spTree>
@@ -4825,6 +4348,1924 @@
     <p:extLst>
       <p:ext uri="{BB962C8B-B14F-4D97-AF65-F5344CB8AC3E}">
         <p14:creationId xmlns:p14="http://schemas.microsoft.com/office/powerpoint/2010/main" val="218625593"/>
+      </p:ext>
+    </p:extLst>
+  </p:cSld>
+  <p:clrMapOvr>
+    <a:masterClrMapping/>
+  </p:clrMapOvr>
+</p:sld>
+</file>
+
+<file path=ppt/slides/slide18.xml><?xml version="1.0" encoding="utf-8"?>
+<p:sld xmlns:a="http://schemas.openxmlformats.org/drawingml/2006/main" xmlns:r="http://schemas.openxmlformats.org/officeDocument/2006/relationships" xmlns:p="http://schemas.openxmlformats.org/presentationml/2006/main">
+  <p:cSld>
+    <p:spTree>
+      <p:nvGrpSpPr>
+        <p:cNvPr id="1" name=""/>
+        <p:cNvGrpSpPr/>
+        <p:nvPr/>
+      </p:nvGrpSpPr>
+      <p:grpSpPr>
+        <a:xfrm>
+          <a:off x="0" y="0"/>
+          <a:ext cx="0" cy="0"/>
+          <a:chOff x="0" y="0"/>
+          <a:chExt cx="0" cy="0"/>
+        </a:xfrm>
+      </p:grpSpPr>
+      <p:sp>
+        <p:nvSpPr>
+          <p:cNvPr id="2" name="Titel 1">
+            <a:extLst>
+              <a:ext uri="{FF2B5EF4-FFF2-40B4-BE49-F238E27FC236}">
+                <a16:creationId xmlns:a16="http://schemas.microsoft.com/office/drawing/2014/main" id="{091E4159-D98D-0D06-D3D4-A4B1A4726948}"/>
+              </a:ext>
+            </a:extLst>
+          </p:cNvPr>
+          <p:cNvSpPr>
+            <a:spLocks noGrp="1"/>
+          </p:cNvSpPr>
+          <p:nvPr>
+            <p:ph type="title"/>
+          </p:nvPr>
+        </p:nvSpPr>
+        <p:spPr/>
+        <p:txBody>
+          <a:bodyPr/>
+          <a:lstStyle/>
+          <a:p>
+            <a:r>
+              <a:rPr lang="de-AT" dirty="0"/>
+              <a:t>Automation muss mehrfach startbar sein</a:t>
+            </a:r>
+          </a:p>
+        </p:txBody>
+      </p:sp>
+      <p:sp>
+        <p:nvSpPr>
+          <p:cNvPr id="3" name="Textplatzhalter 2">
+            <a:extLst>
+              <a:ext uri="{FF2B5EF4-FFF2-40B4-BE49-F238E27FC236}">
+                <a16:creationId xmlns:a16="http://schemas.microsoft.com/office/drawing/2014/main" id="{5EC25699-E81B-A9A8-47FC-77A15A88C7E0}"/>
+              </a:ext>
+            </a:extLst>
+          </p:cNvPr>
+          <p:cNvSpPr>
+            <a:spLocks noGrp="1"/>
+          </p:cNvSpPr>
+          <p:nvPr>
+            <p:ph type="body" sz="quarter" idx="10"/>
+          </p:nvPr>
+        </p:nvSpPr>
+        <p:spPr/>
+        <p:txBody>
+          <a:bodyPr/>
+          <a:lstStyle/>
+          <a:p>
+            <a:r>
+              <a:rPr lang="de-AT" dirty="0"/>
+              <a:t>Modus auf parallel ändern</a:t>
+            </a:r>
+          </a:p>
+        </p:txBody>
+      </p:sp>
+      <p:pic>
+        <p:nvPicPr>
+          <p:cNvPr id="5" name="Grafik 4">
+            <a:extLst>
+              <a:ext uri="{FF2B5EF4-FFF2-40B4-BE49-F238E27FC236}">
+                <a16:creationId xmlns:a16="http://schemas.microsoft.com/office/drawing/2014/main" id="{E9EFFA7C-20C7-1A51-C5FA-00274B979F5E}"/>
+              </a:ext>
+            </a:extLst>
+          </p:cNvPr>
+          <p:cNvPicPr>
+            <a:picLocks noChangeAspect="1"/>
+          </p:cNvPicPr>
+          <p:nvPr/>
+        </p:nvPicPr>
+        <p:blipFill>
+          <a:blip r:embed="rId2"/>
+          <a:stretch>
+            <a:fillRect/>
+          </a:stretch>
+        </p:blipFill>
+        <p:spPr>
+          <a:xfrm>
+            <a:off x="0" y="1948480"/>
+            <a:ext cx="9144000" cy="1644118"/>
+          </a:xfrm>
+          <a:prstGeom prst="rect">
+            <a:avLst/>
+          </a:prstGeom>
+        </p:spPr>
+      </p:pic>
+    </p:spTree>
+    <p:extLst>
+      <p:ext uri="{BB962C8B-B14F-4D97-AF65-F5344CB8AC3E}">
+        <p14:creationId xmlns:p14="http://schemas.microsoft.com/office/powerpoint/2010/main" val="4160334688"/>
+      </p:ext>
+    </p:extLst>
+  </p:cSld>
+  <p:clrMapOvr>
+    <a:masterClrMapping/>
+  </p:clrMapOvr>
+</p:sld>
+</file>
+
+<file path=ppt/slides/slide19.xml><?xml version="1.0" encoding="utf-8"?>
+<p:sld xmlns:a="http://schemas.openxmlformats.org/drawingml/2006/main" xmlns:r="http://schemas.openxmlformats.org/officeDocument/2006/relationships" xmlns:p="http://schemas.openxmlformats.org/presentationml/2006/main">
+  <p:cSld>
+    <p:spTree>
+      <p:nvGrpSpPr>
+        <p:cNvPr id="1" name=""/>
+        <p:cNvGrpSpPr/>
+        <p:nvPr/>
+      </p:nvGrpSpPr>
+      <p:grpSpPr>
+        <a:xfrm>
+          <a:off x="0" y="0"/>
+          <a:ext cx="0" cy="0"/>
+          <a:chOff x="0" y="0"/>
+          <a:chExt cx="0" cy="0"/>
+        </a:xfrm>
+      </p:grpSpPr>
+      <p:sp>
+        <p:nvSpPr>
+          <p:cNvPr id="2" name="Titel 1">
+            <a:extLst>
+              <a:ext uri="{FF2B5EF4-FFF2-40B4-BE49-F238E27FC236}">
+                <a16:creationId xmlns:a16="http://schemas.microsoft.com/office/drawing/2014/main" id="{7208E9D6-232A-933C-22DC-BE51140EDDEB}"/>
+              </a:ext>
+            </a:extLst>
+          </p:cNvPr>
+          <p:cNvSpPr>
+            <a:spLocks noGrp="1"/>
+          </p:cNvSpPr>
+          <p:nvPr>
+            <p:ph type="title"/>
+          </p:nvPr>
+        </p:nvSpPr>
+        <p:spPr/>
+        <p:txBody>
+          <a:bodyPr/>
+          <a:lstStyle/>
+          <a:p>
+            <a:r>
+              <a:rPr lang="de-AT" dirty="0"/>
+              <a:t>Trace mit Aufforderung</a:t>
+            </a:r>
+          </a:p>
+        </p:txBody>
+      </p:sp>
+      <p:sp>
+        <p:nvSpPr>
+          <p:cNvPr id="3" name="Textplatzhalter 2">
+            <a:extLst>
+              <a:ext uri="{FF2B5EF4-FFF2-40B4-BE49-F238E27FC236}">
+                <a16:creationId xmlns:a16="http://schemas.microsoft.com/office/drawing/2014/main" id="{F2AB4162-FBC3-B8FF-0330-884E0FC51D25}"/>
+              </a:ext>
+            </a:extLst>
+          </p:cNvPr>
+          <p:cNvSpPr>
+            <a:spLocks noGrp="1"/>
+          </p:cNvSpPr>
+          <p:nvPr>
+            <p:ph type="body" sz="quarter" idx="10"/>
+          </p:nvPr>
+        </p:nvSpPr>
+        <p:spPr/>
+        <p:txBody>
+          <a:bodyPr/>
+          <a:lstStyle/>
+          <a:p>
+            <a:endParaRPr lang="de-AT"/>
+          </a:p>
+        </p:txBody>
+      </p:sp>
+      <p:pic>
+        <p:nvPicPr>
+          <p:cNvPr id="5" name="Grafik 4">
+            <a:extLst>
+              <a:ext uri="{FF2B5EF4-FFF2-40B4-BE49-F238E27FC236}">
+                <a16:creationId xmlns:a16="http://schemas.microsoft.com/office/drawing/2014/main" id="{3FC50A35-16FF-26A4-6339-BB37F0B3049F}"/>
+              </a:ext>
+            </a:extLst>
+          </p:cNvPr>
+          <p:cNvPicPr>
+            <a:picLocks noChangeAspect="1"/>
+          </p:cNvPicPr>
+          <p:nvPr/>
+        </p:nvPicPr>
+        <p:blipFill>
+          <a:blip r:embed="rId2"/>
+          <a:stretch>
+            <a:fillRect/>
+          </a:stretch>
+        </p:blipFill>
+        <p:spPr>
+          <a:xfrm>
+            <a:off x="1691680" y="1155063"/>
+            <a:ext cx="5981801" cy="5577524"/>
+          </a:xfrm>
+          <a:prstGeom prst="rect">
+            <a:avLst/>
+          </a:prstGeom>
+        </p:spPr>
+      </p:pic>
+    </p:spTree>
+    <p:extLst>
+      <p:ext uri="{BB962C8B-B14F-4D97-AF65-F5344CB8AC3E}">
+        <p14:creationId xmlns:p14="http://schemas.microsoft.com/office/powerpoint/2010/main" val="1645972749"/>
+      </p:ext>
+    </p:extLst>
+  </p:cSld>
+  <p:clrMapOvr>
+    <a:masterClrMapping/>
+  </p:clrMapOvr>
+</p:sld>
+</file>
+
+<file path=ppt/slides/slide2.xml><?xml version="1.0" encoding="utf-8"?>
+<p:sld xmlns:a="http://schemas.openxmlformats.org/drawingml/2006/main" xmlns:r="http://schemas.openxmlformats.org/officeDocument/2006/relationships" xmlns:p="http://schemas.openxmlformats.org/presentationml/2006/main">
+  <p:cSld>
+    <p:spTree>
+      <p:nvGrpSpPr>
+        <p:cNvPr id="1" name=""/>
+        <p:cNvGrpSpPr/>
+        <p:nvPr/>
+      </p:nvGrpSpPr>
+      <p:grpSpPr>
+        <a:xfrm>
+          <a:off x="0" y="0"/>
+          <a:ext cx="0" cy="0"/>
+          <a:chOff x="0" y="0"/>
+          <a:chExt cx="0" cy="0"/>
+        </a:xfrm>
+      </p:grpSpPr>
+      <p:sp>
+        <p:nvSpPr>
+          <p:cNvPr id="2" name="Titel 1">
+            <a:extLst>
+              <a:ext uri="{FF2B5EF4-FFF2-40B4-BE49-F238E27FC236}">
+                <a16:creationId xmlns:a16="http://schemas.microsoft.com/office/drawing/2014/main" id="{B3430DC3-E7D5-9EF7-A4D0-C937287A57FB}"/>
+              </a:ext>
+            </a:extLst>
+          </p:cNvPr>
+          <p:cNvSpPr>
+            <a:spLocks noGrp="1"/>
+          </p:cNvSpPr>
+          <p:nvPr>
+            <p:ph type="title"/>
+          </p:nvPr>
+        </p:nvSpPr>
+        <p:spPr/>
+        <p:txBody>
+          <a:bodyPr/>
+          <a:lstStyle/>
+          <a:p>
+            <a:r>
+              <a:rPr lang="de-AT" dirty="0"/>
+              <a:t>Erster Test</a:t>
+            </a:r>
+          </a:p>
+        </p:txBody>
+      </p:sp>
+      <p:sp>
+        <p:nvSpPr>
+          <p:cNvPr id="3" name="Textplatzhalter 2">
+            <a:extLst>
+              <a:ext uri="{FF2B5EF4-FFF2-40B4-BE49-F238E27FC236}">
+                <a16:creationId xmlns:a16="http://schemas.microsoft.com/office/drawing/2014/main" id="{C88B958F-ADAF-CBC8-AEB3-86B9EDF27DCE}"/>
+              </a:ext>
+            </a:extLst>
+          </p:cNvPr>
+          <p:cNvSpPr>
+            <a:spLocks noGrp="1"/>
+          </p:cNvSpPr>
+          <p:nvPr>
+            <p:ph type="body" sz="quarter" idx="10"/>
+          </p:nvPr>
+        </p:nvSpPr>
+        <p:spPr/>
+        <p:txBody>
+          <a:bodyPr/>
+          <a:lstStyle/>
+          <a:p>
+            <a:endParaRPr lang="de-AT"/>
+          </a:p>
+        </p:txBody>
+      </p:sp>
+      <p:pic>
+        <p:nvPicPr>
+          <p:cNvPr id="5" name="Grafik 4">
+            <a:extLst>
+              <a:ext uri="{FF2B5EF4-FFF2-40B4-BE49-F238E27FC236}">
+                <a16:creationId xmlns:a16="http://schemas.microsoft.com/office/drawing/2014/main" id="{C2AAFDD0-CD89-9911-AAF9-2DDC34268D8E}"/>
+              </a:ext>
+            </a:extLst>
+          </p:cNvPr>
+          <p:cNvPicPr>
+            <a:picLocks noChangeAspect="1"/>
+          </p:cNvPicPr>
+          <p:nvPr/>
+        </p:nvPicPr>
+        <p:blipFill>
+          <a:blip r:embed="rId2"/>
+          <a:stretch>
+            <a:fillRect/>
+          </a:stretch>
+        </p:blipFill>
+        <p:spPr>
+          <a:xfrm>
+            <a:off x="180975" y="1857375"/>
+            <a:ext cx="8782050" cy="3143250"/>
+          </a:xfrm>
+          <a:prstGeom prst="rect">
+            <a:avLst/>
+          </a:prstGeom>
+        </p:spPr>
+      </p:pic>
+    </p:spTree>
+    <p:extLst>
+      <p:ext uri="{BB962C8B-B14F-4D97-AF65-F5344CB8AC3E}">
+        <p14:creationId xmlns:p14="http://schemas.microsoft.com/office/powerpoint/2010/main" val="314570025"/>
+      </p:ext>
+    </p:extLst>
+  </p:cSld>
+  <p:clrMapOvr>
+    <a:masterClrMapping/>
+  </p:clrMapOvr>
+</p:sld>
+</file>
+
+<file path=ppt/slides/slide20.xml><?xml version="1.0" encoding="utf-8"?>
+<p:sld xmlns:a="http://schemas.openxmlformats.org/drawingml/2006/main" xmlns:r="http://schemas.openxmlformats.org/officeDocument/2006/relationships" xmlns:p="http://schemas.openxmlformats.org/presentationml/2006/main">
+  <p:cSld>
+    <p:spTree>
+      <p:nvGrpSpPr>
+        <p:cNvPr id="1" name=""/>
+        <p:cNvGrpSpPr/>
+        <p:nvPr/>
+      </p:nvGrpSpPr>
+      <p:grpSpPr>
+        <a:xfrm>
+          <a:off x="0" y="0"/>
+          <a:ext cx="0" cy="0"/>
+          <a:chOff x="0" y="0"/>
+          <a:chExt cx="0" cy="0"/>
+        </a:xfrm>
+      </p:grpSpPr>
+      <p:sp>
+        <p:nvSpPr>
+          <p:cNvPr id="2" name="Titel 1">
+            <a:extLst>
+              <a:ext uri="{FF2B5EF4-FFF2-40B4-BE49-F238E27FC236}">
+                <a16:creationId xmlns:a16="http://schemas.microsoft.com/office/drawing/2014/main" id="{C59EEA7D-2B4D-A651-6CB9-DFF66C625F3F}"/>
+              </a:ext>
+            </a:extLst>
+          </p:cNvPr>
+          <p:cNvSpPr>
+            <a:spLocks noGrp="1"/>
+          </p:cNvSpPr>
+          <p:nvPr>
+            <p:ph type="title"/>
+          </p:nvPr>
+        </p:nvSpPr>
+        <p:spPr/>
+        <p:txBody>
+          <a:bodyPr/>
+          <a:lstStyle/>
+          <a:p>
+            <a:r>
+              <a:rPr lang="de-AT" dirty="0"/>
+              <a:t>Bestätigung durch Handy</a:t>
+            </a:r>
+          </a:p>
+        </p:txBody>
+      </p:sp>
+      <p:sp>
+        <p:nvSpPr>
+          <p:cNvPr id="3" name="Textplatzhalter 2">
+            <a:extLst>
+              <a:ext uri="{FF2B5EF4-FFF2-40B4-BE49-F238E27FC236}">
+                <a16:creationId xmlns:a16="http://schemas.microsoft.com/office/drawing/2014/main" id="{56245907-2E0B-9053-D5F9-0DB24AD9C832}"/>
+              </a:ext>
+            </a:extLst>
+          </p:cNvPr>
+          <p:cNvSpPr>
+            <a:spLocks noGrp="1"/>
+          </p:cNvSpPr>
+          <p:nvPr>
+            <p:ph type="body" sz="quarter" idx="10"/>
+          </p:nvPr>
+        </p:nvSpPr>
+        <p:spPr/>
+        <p:txBody>
+          <a:bodyPr/>
+          <a:lstStyle/>
+          <a:p>
+            <a:endParaRPr lang="de-AT"/>
+          </a:p>
+        </p:txBody>
+      </p:sp>
+      <p:pic>
+        <p:nvPicPr>
+          <p:cNvPr id="5" name="Grafik 4">
+            <a:extLst>
+              <a:ext uri="{FF2B5EF4-FFF2-40B4-BE49-F238E27FC236}">
+                <a16:creationId xmlns:a16="http://schemas.microsoft.com/office/drawing/2014/main" id="{4A555869-60B1-264F-A3AA-59292BDE5C98}"/>
+              </a:ext>
+            </a:extLst>
+          </p:cNvPr>
+          <p:cNvPicPr>
+            <a:picLocks noChangeAspect="1"/>
+          </p:cNvPicPr>
+          <p:nvPr/>
+        </p:nvPicPr>
+        <p:blipFill>
+          <a:blip r:embed="rId2"/>
+          <a:stretch>
+            <a:fillRect/>
+          </a:stretch>
+        </p:blipFill>
+        <p:spPr>
+          <a:xfrm>
+            <a:off x="1552210" y="995564"/>
+            <a:ext cx="6039580" cy="5544290"/>
+          </a:xfrm>
+          <a:prstGeom prst="rect">
+            <a:avLst/>
+          </a:prstGeom>
+        </p:spPr>
+      </p:pic>
+    </p:spTree>
+    <p:extLst>
+      <p:ext uri="{BB962C8B-B14F-4D97-AF65-F5344CB8AC3E}">
+        <p14:creationId xmlns:p14="http://schemas.microsoft.com/office/powerpoint/2010/main" val="3864918587"/>
+      </p:ext>
+    </p:extLst>
+  </p:cSld>
+  <p:clrMapOvr>
+    <a:masterClrMapping/>
+  </p:clrMapOvr>
+</p:sld>
+</file>
+
+<file path=ppt/slides/slide21.xml><?xml version="1.0" encoding="utf-8"?>
+<p:sld xmlns:a="http://schemas.openxmlformats.org/drawingml/2006/main" xmlns:r="http://schemas.openxmlformats.org/officeDocument/2006/relationships" xmlns:p="http://schemas.openxmlformats.org/presentationml/2006/main">
+  <p:cSld>
+    <p:spTree>
+      <p:nvGrpSpPr>
+        <p:cNvPr id="1" name=""/>
+        <p:cNvGrpSpPr/>
+        <p:nvPr/>
+      </p:nvGrpSpPr>
+      <p:grpSpPr>
+        <a:xfrm>
+          <a:off x="0" y="0"/>
+          <a:ext cx="0" cy="0"/>
+          <a:chOff x="0" y="0"/>
+          <a:chExt cx="0" cy="0"/>
+        </a:xfrm>
+      </p:grpSpPr>
+      <p:sp>
+        <p:nvSpPr>
+          <p:cNvPr id="2" name="Titel 1">
+            <a:extLst>
+              <a:ext uri="{FF2B5EF4-FFF2-40B4-BE49-F238E27FC236}">
+                <a16:creationId xmlns:a16="http://schemas.microsoft.com/office/drawing/2014/main" id="{1FA64F8B-58AF-4B3E-3CD6-FACB4A7C909A}"/>
+              </a:ext>
+            </a:extLst>
+          </p:cNvPr>
+          <p:cNvSpPr>
+            <a:spLocks noGrp="1"/>
+          </p:cNvSpPr>
+          <p:nvPr>
+            <p:ph type="title"/>
+          </p:nvPr>
+        </p:nvSpPr>
+        <p:spPr/>
+        <p:txBody>
+          <a:bodyPr/>
+          <a:lstStyle/>
+          <a:p>
+            <a:r>
+              <a:rPr lang="de-AT" dirty="0" err="1"/>
+              <a:t>Yaml</a:t>
+            </a:r>
+            <a:r>
+              <a:rPr lang="de-AT" dirty="0"/>
+              <a:t>-Code</a:t>
+            </a:r>
+          </a:p>
+        </p:txBody>
+      </p:sp>
+      <p:sp>
+        <p:nvSpPr>
+          <p:cNvPr id="3" name="Textplatzhalter 2">
+            <a:extLst>
+              <a:ext uri="{FF2B5EF4-FFF2-40B4-BE49-F238E27FC236}">
+                <a16:creationId xmlns:a16="http://schemas.microsoft.com/office/drawing/2014/main" id="{8E59B9E7-CC9D-F765-F4D9-BA2A475B38BC}"/>
+              </a:ext>
+            </a:extLst>
+          </p:cNvPr>
+          <p:cNvSpPr>
+            <a:spLocks noGrp="1"/>
+          </p:cNvSpPr>
+          <p:nvPr>
+            <p:ph type="body" sz="quarter" idx="10"/>
+          </p:nvPr>
+        </p:nvSpPr>
+        <p:spPr/>
+        <p:txBody>
+          <a:bodyPr/>
+          <a:lstStyle/>
+          <a:p>
+            <a:endParaRPr lang="de-AT" dirty="0"/>
+          </a:p>
+        </p:txBody>
+      </p:sp>
+      <p:pic>
+        <p:nvPicPr>
+          <p:cNvPr id="5" name="Grafik 4">
+            <a:extLst>
+              <a:ext uri="{FF2B5EF4-FFF2-40B4-BE49-F238E27FC236}">
+                <a16:creationId xmlns:a16="http://schemas.microsoft.com/office/drawing/2014/main" id="{A4BED1FE-D63A-63B6-8591-920580CC99D1}"/>
+              </a:ext>
+            </a:extLst>
+          </p:cNvPr>
+          <p:cNvPicPr>
+            <a:picLocks noChangeAspect="1"/>
+          </p:cNvPicPr>
+          <p:nvPr/>
+        </p:nvPicPr>
+        <p:blipFill>
+          <a:blip r:embed="rId3"/>
+          <a:stretch>
+            <a:fillRect/>
+          </a:stretch>
+        </p:blipFill>
+        <p:spPr>
+          <a:xfrm>
+            <a:off x="1794664" y="908720"/>
+            <a:ext cx="5554671" cy="5732854"/>
+          </a:xfrm>
+          <a:prstGeom prst="rect">
+            <a:avLst/>
+          </a:prstGeom>
+        </p:spPr>
+      </p:pic>
+    </p:spTree>
+    <p:extLst>
+      <p:ext uri="{BB962C8B-B14F-4D97-AF65-F5344CB8AC3E}">
+        <p14:creationId xmlns:p14="http://schemas.microsoft.com/office/powerpoint/2010/main" val="377221077"/>
+      </p:ext>
+    </p:extLst>
+  </p:cSld>
+  <p:clrMapOvr>
+    <a:masterClrMapping/>
+  </p:clrMapOvr>
+</p:sld>
+</file>
+
+<file path=ppt/slides/slide3.xml><?xml version="1.0" encoding="utf-8"?>
+<p:sld xmlns:a="http://schemas.openxmlformats.org/drawingml/2006/main" xmlns:r="http://schemas.openxmlformats.org/officeDocument/2006/relationships" xmlns:p="http://schemas.openxmlformats.org/presentationml/2006/main">
+  <p:cSld>
+    <p:spTree>
+      <p:nvGrpSpPr>
+        <p:cNvPr id="1" name=""/>
+        <p:cNvGrpSpPr/>
+        <p:nvPr/>
+      </p:nvGrpSpPr>
+      <p:grpSpPr>
+        <a:xfrm>
+          <a:off x="0" y="0"/>
+          <a:ext cx="0" cy="0"/>
+          <a:chOff x="0" y="0"/>
+          <a:chExt cx="0" cy="0"/>
+        </a:xfrm>
+      </p:grpSpPr>
+      <p:sp>
+        <p:nvSpPr>
+          <p:cNvPr id="2" name="Titel 1">
+            <a:extLst>
+              <a:ext uri="{FF2B5EF4-FFF2-40B4-BE49-F238E27FC236}">
+                <a16:creationId xmlns:a16="http://schemas.microsoft.com/office/drawing/2014/main" id="{F548C1CE-A164-80A5-2002-84FEDDBF7C34}"/>
+              </a:ext>
+            </a:extLst>
+          </p:cNvPr>
+          <p:cNvSpPr>
+            <a:spLocks noGrp="1"/>
+          </p:cNvSpPr>
+          <p:nvPr>
+            <p:ph type="title"/>
+          </p:nvPr>
+        </p:nvSpPr>
+        <p:spPr/>
+        <p:txBody>
+          <a:bodyPr/>
+          <a:lstStyle/>
+          <a:p>
+            <a:r>
+              <a:rPr lang="de-AT" dirty="0"/>
+              <a:t>Text verschicken</a:t>
+            </a:r>
+          </a:p>
+        </p:txBody>
+      </p:sp>
+      <p:sp>
+        <p:nvSpPr>
+          <p:cNvPr id="3" name="Textplatzhalter 2">
+            <a:extLst>
+              <a:ext uri="{FF2B5EF4-FFF2-40B4-BE49-F238E27FC236}">
+                <a16:creationId xmlns:a16="http://schemas.microsoft.com/office/drawing/2014/main" id="{B9813C55-BB68-42DB-9436-58FE19EFE441}"/>
+              </a:ext>
+            </a:extLst>
+          </p:cNvPr>
+          <p:cNvSpPr>
+            <a:spLocks noGrp="1"/>
+          </p:cNvSpPr>
+          <p:nvPr>
+            <p:ph type="body" sz="quarter" idx="10"/>
+          </p:nvPr>
+        </p:nvSpPr>
+        <p:spPr/>
+        <p:txBody>
+          <a:bodyPr/>
+          <a:lstStyle/>
+          <a:p>
+            <a:endParaRPr lang="de-AT"/>
+          </a:p>
+        </p:txBody>
+      </p:sp>
+      <p:pic>
+        <p:nvPicPr>
+          <p:cNvPr id="5" name="Grafik 4">
+            <a:extLst>
+              <a:ext uri="{FF2B5EF4-FFF2-40B4-BE49-F238E27FC236}">
+                <a16:creationId xmlns:a16="http://schemas.microsoft.com/office/drawing/2014/main" id="{5E050AF9-666F-807F-2A40-4FD19C78FA9F}"/>
+              </a:ext>
+            </a:extLst>
+          </p:cNvPr>
+          <p:cNvPicPr>
+            <a:picLocks noChangeAspect="1"/>
+          </p:cNvPicPr>
+          <p:nvPr/>
+        </p:nvPicPr>
+        <p:blipFill>
+          <a:blip r:embed="rId2"/>
+          <a:stretch>
+            <a:fillRect/>
+          </a:stretch>
+        </p:blipFill>
+        <p:spPr>
+          <a:xfrm>
+            <a:off x="179512" y="981075"/>
+            <a:ext cx="7727776" cy="4346874"/>
+          </a:xfrm>
+          <a:prstGeom prst="rect">
+            <a:avLst/>
+          </a:prstGeom>
+        </p:spPr>
+      </p:pic>
+      <p:pic>
+        <p:nvPicPr>
+          <p:cNvPr id="7" name="Grafik 6">
+            <a:extLst>
+              <a:ext uri="{FF2B5EF4-FFF2-40B4-BE49-F238E27FC236}">
+                <a16:creationId xmlns:a16="http://schemas.microsoft.com/office/drawing/2014/main" id="{D8D919BF-181D-E0F6-2222-023B80EE6ECE}"/>
+              </a:ext>
+            </a:extLst>
+          </p:cNvPr>
+          <p:cNvPicPr>
+            <a:picLocks noChangeAspect="1"/>
+          </p:cNvPicPr>
+          <p:nvPr/>
+        </p:nvPicPr>
+        <p:blipFill>
+          <a:blip r:embed="rId3"/>
+          <a:stretch>
+            <a:fillRect/>
+          </a:stretch>
+        </p:blipFill>
+        <p:spPr>
+          <a:xfrm>
+            <a:off x="5821238" y="4438650"/>
+            <a:ext cx="3143250" cy="2419350"/>
+          </a:xfrm>
+          <a:prstGeom prst="rect">
+            <a:avLst/>
+          </a:prstGeom>
+        </p:spPr>
+      </p:pic>
+    </p:spTree>
+    <p:extLst>
+      <p:ext uri="{BB962C8B-B14F-4D97-AF65-F5344CB8AC3E}">
+        <p14:creationId xmlns:p14="http://schemas.microsoft.com/office/powerpoint/2010/main" val="852513930"/>
+      </p:ext>
+    </p:extLst>
+  </p:cSld>
+  <p:clrMapOvr>
+    <a:masterClrMapping/>
+  </p:clrMapOvr>
+</p:sld>
+</file>
+
+<file path=ppt/slides/slide4.xml><?xml version="1.0" encoding="utf-8"?>
+<p:sld xmlns:a="http://schemas.openxmlformats.org/drawingml/2006/main" xmlns:r="http://schemas.openxmlformats.org/officeDocument/2006/relationships" xmlns:p="http://schemas.openxmlformats.org/presentationml/2006/main">
+  <p:cSld>
+    <p:spTree>
+      <p:nvGrpSpPr>
+        <p:cNvPr id="1" name=""/>
+        <p:cNvGrpSpPr/>
+        <p:nvPr/>
+      </p:nvGrpSpPr>
+      <p:grpSpPr>
+        <a:xfrm>
+          <a:off x="0" y="0"/>
+          <a:ext cx="0" cy="0"/>
+          <a:chOff x="0" y="0"/>
+          <a:chExt cx="0" cy="0"/>
+        </a:xfrm>
+      </p:grpSpPr>
+      <p:sp>
+        <p:nvSpPr>
+          <p:cNvPr id="2" name="Titel 1">
+            <a:extLst>
+              <a:ext uri="{FF2B5EF4-FFF2-40B4-BE49-F238E27FC236}">
+                <a16:creationId xmlns:a16="http://schemas.microsoft.com/office/drawing/2014/main" id="{A006F92C-1C28-D456-8765-5C23559497D5}"/>
+              </a:ext>
+            </a:extLst>
+          </p:cNvPr>
+          <p:cNvSpPr>
+            <a:spLocks noGrp="1"/>
+          </p:cNvSpPr>
+          <p:nvPr>
+            <p:ph type="title"/>
+          </p:nvPr>
+        </p:nvSpPr>
+        <p:spPr/>
+        <p:txBody>
+          <a:bodyPr/>
+          <a:lstStyle/>
+          <a:p>
+            <a:r>
+              <a:rPr lang="de-AT" dirty="0" err="1"/>
+              <a:t>Actionable</a:t>
+            </a:r>
+            <a:r>
+              <a:rPr lang="de-AT" dirty="0"/>
+              <a:t> </a:t>
+            </a:r>
+            <a:r>
+              <a:rPr lang="de-AT" dirty="0" err="1"/>
+              <a:t>Notifications</a:t>
+            </a:r>
+            <a:endParaRPr lang="de-AT" dirty="0"/>
+          </a:p>
+        </p:txBody>
+      </p:sp>
+      <p:sp>
+        <p:nvSpPr>
+          <p:cNvPr id="3" name="Textplatzhalter 2">
+            <a:extLst>
+              <a:ext uri="{FF2B5EF4-FFF2-40B4-BE49-F238E27FC236}">
+                <a16:creationId xmlns:a16="http://schemas.microsoft.com/office/drawing/2014/main" id="{54AD6D78-600C-F92B-94CB-08E170F2CC69}"/>
+              </a:ext>
+            </a:extLst>
+          </p:cNvPr>
+          <p:cNvSpPr>
+            <a:spLocks noGrp="1"/>
+          </p:cNvSpPr>
+          <p:nvPr>
+            <p:ph type="body" sz="quarter" idx="10"/>
+          </p:nvPr>
+        </p:nvSpPr>
+        <p:spPr/>
+        <p:txBody>
+          <a:bodyPr/>
+          <a:lstStyle/>
+          <a:p>
+            <a:r>
+              <a:rPr lang="de-AT" dirty="0" err="1"/>
+              <a:t>Notification</a:t>
+            </a:r>
+            <a:r>
+              <a:rPr lang="de-AT" dirty="0"/>
+              <a:t> enthält Button</a:t>
+            </a:r>
+          </a:p>
+          <a:p>
+            <a:pPr lvl="1"/>
+            <a:r>
+              <a:rPr lang="de-AT" dirty="0"/>
+              <a:t>Press kann Action auf HA ausführen</a:t>
+            </a:r>
+          </a:p>
+          <a:p>
+            <a:pPr lvl="1"/>
+            <a:r>
+              <a:rPr lang="de-AT" dirty="0"/>
+              <a:t>URI:  navigiert direkt zu einem Dashboard</a:t>
+            </a:r>
+          </a:p>
+          <a:p>
+            <a:pPr lvl="2"/>
+            <a:r>
+              <a:rPr lang="de-AT" dirty="0"/>
+              <a:t>Beispiel: Zone Shop </a:t>
+            </a:r>
+            <a:r>
+              <a:rPr lang="de-AT" dirty="0" err="1"/>
+              <a:t>entered</a:t>
+            </a:r>
+            <a:r>
+              <a:rPr lang="de-AT" dirty="0"/>
+              <a:t> </a:t>
+            </a:r>
+            <a:r>
+              <a:rPr lang="de-AT" dirty="0">
+                <a:sym typeface="Wingdings" panose="05000000000000000000" pitchFamily="2" charset="2"/>
+              </a:rPr>
+              <a:t> open shopping-list</a:t>
+            </a:r>
+          </a:p>
+          <a:p>
+            <a:pPr lvl="1"/>
+            <a:r>
+              <a:rPr lang="de-AT" dirty="0">
+                <a:sym typeface="Wingdings" panose="05000000000000000000" pitchFamily="2" charset="2"/>
+              </a:rPr>
+              <a:t>Ausführung einer Automation</a:t>
+            </a:r>
+          </a:p>
+          <a:p>
+            <a:pPr lvl="2"/>
+            <a:r>
+              <a:rPr lang="de-AT" dirty="0">
+                <a:sym typeface="Wingdings" panose="05000000000000000000" pitchFamily="2" charset="2"/>
+              </a:rPr>
+              <a:t>Beispiel: Zone Home  open </a:t>
+            </a:r>
+            <a:r>
+              <a:rPr lang="de-AT" dirty="0" err="1">
+                <a:sym typeface="Wingdings" panose="05000000000000000000" pitchFamily="2" charset="2"/>
+              </a:rPr>
+              <a:t>garage</a:t>
+            </a:r>
+            <a:endParaRPr lang="de-AT" dirty="0"/>
+          </a:p>
+        </p:txBody>
+      </p:sp>
+      <p:pic>
+        <p:nvPicPr>
+          <p:cNvPr id="5" name="Grafik 4">
+            <a:extLst>
+              <a:ext uri="{FF2B5EF4-FFF2-40B4-BE49-F238E27FC236}">
+                <a16:creationId xmlns:a16="http://schemas.microsoft.com/office/drawing/2014/main" id="{CB0B37AD-EFA0-3142-7885-BD6D86DA1280}"/>
+              </a:ext>
+            </a:extLst>
+          </p:cNvPr>
+          <p:cNvPicPr>
+            <a:picLocks noChangeAspect="1"/>
+          </p:cNvPicPr>
+          <p:nvPr/>
+        </p:nvPicPr>
+        <p:blipFill>
+          <a:blip r:embed="rId2"/>
+          <a:stretch>
+            <a:fillRect/>
+          </a:stretch>
+        </p:blipFill>
+        <p:spPr>
+          <a:xfrm>
+            <a:off x="560928" y="4149080"/>
+            <a:ext cx="8022143" cy="2063744"/>
+          </a:xfrm>
+          <a:prstGeom prst="rect">
+            <a:avLst/>
+          </a:prstGeom>
+        </p:spPr>
+      </p:pic>
+    </p:spTree>
+    <p:extLst>
+      <p:ext uri="{BB962C8B-B14F-4D97-AF65-F5344CB8AC3E}">
+        <p14:creationId xmlns:p14="http://schemas.microsoft.com/office/powerpoint/2010/main" val="1444999320"/>
+      </p:ext>
+    </p:extLst>
+  </p:cSld>
+  <p:clrMapOvr>
+    <a:masterClrMapping/>
+  </p:clrMapOvr>
+</p:sld>
+</file>
+
+<file path=ppt/slides/slide5.xml><?xml version="1.0" encoding="utf-8"?>
+<p:sld xmlns:a="http://schemas.openxmlformats.org/drawingml/2006/main" xmlns:r="http://schemas.openxmlformats.org/officeDocument/2006/relationships" xmlns:p="http://schemas.openxmlformats.org/presentationml/2006/main">
+  <p:cSld>
+    <p:spTree>
+      <p:nvGrpSpPr>
+        <p:cNvPr id="1" name=""/>
+        <p:cNvGrpSpPr/>
+        <p:nvPr/>
+      </p:nvGrpSpPr>
+      <p:grpSpPr>
+        <a:xfrm>
+          <a:off x="0" y="0"/>
+          <a:ext cx="0" cy="0"/>
+          <a:chOff x="0" y="0"/>
+          <a:chExt cx="0" cy="0"/>
+        </a:xfrm>
+      </p:grpSpPr>
+      <p:sp>
+        <p:nvSpPr>
+          <p:cNvPr id="2" name="Titel 1">
+            <a:extLst>
+              <a:ext uri="{FF2B5EF4-FFF2-40B4-BE49-F238E27FC236}">
+                <a16:creationId xmlns:a16="http://schemas.microsoft.com/office/drawing/2014/main" id="{2014C1F7-2AD4-247C-3E9A-2F17A4246C35}"/>
+              </a:ext>
+            </a:extLst>
+          </p:cNvPr>
+          <p:cNvSpPr>
+            <a:spLocks noGrp="1"/>
+          </p:cNvSpPr>
+          <p:nvPr>
+            <p:ph type="title"/>
+          </p:nvPr>
+        </p:nvSpPr>
+        <p:spPr/>
+        <p:txBody>
+          <a:bodyPr/>
+          <a:lstStyle/>
+          <a:p>
+            <a:r>
+              <a:rPr lang="de-AT" dirty="0"/>
+              <a:t>Beispiel</a:t>
+            </a:r>
+          </a:p>
+        </p:txBody>
+      </p:sp>
+      <p:sp>
+        <p:nvSpPr>
+          <p:cNvPr id="3" name="Textplatzhalter 2">
+            <a:extLst>
+              <a:ext uri="{FF2B5EF4-FFF2-40B4-BE49-F238E27FC236}">
+                <a16:creationId xmlns:a16="http://schemas.microsoft.com/office/drawing/2014/main" id="{DBDDBAB0-1027-A08C-6866-1CF6DEBEF7E2}"/>
+              </a:ext>
+            </a:extLst>
+          </p:cNvPr>
+          <p:cNvSpPr>
+            <a:spLocks noGrp="1"/>
+          </p:cNvSpPr>
+          <p:nvPr>
+            <p:ph type="body" sz="quarter" idx="10"/>
+          </p:nvPr>
+        </p:nvSpPr>
+        <p:spPr/>
+        <p:txBody>
+          <a:bodyPr/>
+          <a:lstStyle/>
+          <a:p>
+            <a:r>
+              <a:rPr lang="de-AT" dirty="0"/>
+              <a:t>Wird der Türkontakt geöffnet, soll der </a:t>
+            </a:r>
+            <a:r>
+              <a:rPr lang="de-AT" dirty="0" err="1"/>
+              <a:t>Zigbee</a:t>
+            </a:r>
+            <a:r>
+              <a:rPr lang="de-AT" dirty="0"/>
+              <a:t>-Plug geschlossen werden</a:t>
+            </a:r>
+          </a:p>
+          <a:p>
+            <a:r>
+              <a:rPr lang="de-AT" dirty="0"/>
+              <a:t>Ignorieren wird über Home Assistant protokolliert</a:t>
+            </a:r>
+          </a:p>
+        </p:txBody>
+      </p:sp>
+      <p:pic>
+        <p:nvPicPr>
+          <p:cNvPr id="5" name="Grafik 4">
+            <a:extLst>
+              <a:ext uri="{FF2B5EF4-FFF2-40B4-BE49-F238E27FC236}">
+                <a16:creationId xmlns:a16="http://schemas.microsoft.com/office/drawing/2014/main" id="{E3745D1B-8D0D-E1C3-3E31-6BC8ED919835}"/>
+              </a:ext>
+            </a:extLst>
+          </p:cNvPr>
+          <p:cNvPicPr>
+            <a:picLocks noChangeAspect="1"/>
+          </p:cNvPicPr>
+          <p:nvPr/>
+        </p:nvPicPr>
+        <p:blipFill>
+          <a:blip r:embed="rId2"/>
+          <a:stretch>
+            <a:fillRect/>
+          </a:stretch>
+        </p:blipFill>
+        <p:spPr>
+          <a:xfrm>
+            <a:off x="1763688" y="3010098"/>
+            <a:ext cx="5192826" cy="2579142"/>
+          </a:xfrm>
+          <a:prstGeom prst="rect">
+            <a:avLst/>
+          </a:prstGeom>
+        </p:spPr>
+      </p:pic>
+      <p:sp>
+        <p:nvSpPr>
+          <p:cNvPr id="6" name="Textfeld 4">
+            <a:extLst>
+              <a:ext uri="{FF2B5EF4-FFF2-40B4-BE49-F238E27FC236}">
+                <a16:creationId xmlns:a16="http://schemas.microsoft.com/office/drawing/2014/main" id="{F66EC9E0-E9A4-B3D1-B1F8-B8EE0EC6D9B0}"/>
+              </a:ext>
+            </a:extLst>
+          </p:cNvPr>
+          <p:cNvSpPr txBox="1"/>
+          <p:nvPr/>
+        </p:nvSpPr>
+        <p:spPr>
+          <a:xfrm rot="20109396">
+            <a:off x="7896544" y="6143346"/>
+            <a:ext cx="1093569" cy="461665"/>
+          </a:xfrm>
+          <a:prstGeom prst="rect">
+            <a:avLst/>
+          </a:prstGeom>
+          <a:noFill/>
+        </p:spPr>
+        <p:txBody>
+          <a:bodyPr wrap="none" rtlCol="0">
+            <a:spAutoFit/>
+          </a:bodyPr>
+          <a:lstStyle>
+            <a:defPPr>
+              <a:defRPr lang="de-DE"/>
+            </a:defPPr>
+            <a:lvl1pPr algn="l" rtl="0" fontAlgn="base">
+              <a:spcBef>
+                <a:spcPct val="0"/>
+              </a:spcBef>
+              <a:spcAft>
+                <a:spcPct val="0"/>
+              </a:spcAft>
+              <a:defRPr kern="1200">
+                <a:solidFill>
+                  <a:schemeClr val="tx1"/>
+                </a:solidFill>
+                <a:latin typeface="Arial" charset="0"/>
+                <a:ea typeface="+mn-ea"/>
+                <a:cs typeface="+mn-cs"/>
+              </a:defRPr>
+            </a:lvl1pPr>
+            <a:lvl2pPr marL="457200" algn="l" rtl="0" fontAlgn="base">
+              <a:spcBef>
+                <a:spcPct val="0"/>
+              </a:spcBef>
+              <a:spcAft>
+                <a:spcPct val="0"/>
+              </a:spcAft>
+              <a:defRPr kern="1200">
+                <a:solidFill>
+                  <a:schemeClr val="tx1"/>
+                </a:solidFill>
+                <a:latin typeface="Arial" charset="0"/>
+                <a:ea typeface="+mn-ea"/>
+                <a:cs typeface="+mn-cs"/>
+              </a:defRPr>
+            </a:lvl2pPr>
+            <a:lvl3pPr marL="914400" algn="l" rtl="0" fontAlgn="base">
+              <a:spcBef>
+                <a:spcPct val="0"/>
+              </a:spcBef>
+              <a:spcAft>
+                <a:spcPct val="0"/>
+              </a:spcAft>
+              <a:defRPr kern="1200">
+                <a:solidFill>
+                  <a:schemeClr val="tx1"/>
+                </a:solidFill>
+                <a:latin typeface="Arial" charset="0"/>
+                <a:ea typeface="+mn-ea"/>
+                <a:cs typeface="+mn-cs"/>
+              </a:defRPr>
+            </a:lvl3pPr>
+            <a:lvl4pPr marL="1371600" algn="l" rtl="0" fontAlgn="base">
+              <a:spcBef>
+                <a:spcPct val="0"/>
+              </a:spcBef>
+              <a:spcAft>
+                <a:spcPct val="0"/>
+              </a:spcAft>
+              <a:defRPr kern="1200">
+                <a:solidFill>
+                  <a:schemeClr val="tx1"/>
+                </a:solidFill>
+                <a:latin typeface="Arial" charset="0"/>
+                <a:ea typeface="+mn-ea"/>
+                <a:cs typeface="+mn-cs"/>
+              </a:defRPr>
+            </a:lvl4pPr>
+            <a:lvl5pPr marL="1828800" algn="l" rtl="0" fontAlgn="base">
+              <a:spcBef>
+                <a:spcPct val="0"/>
+              </a:spcBef>
+              <a:spcAft>
+                <a:spcPct val="0"/>
+              </a:spcAft>
+              <a:defRPr kern="1200">
+                <a:solidFill>
+                  <a:schemeClr val="tx1"/>
+                </a:solidFill>
+                <a:latin typeface="Arial" charset="0"/>
+                <a:ea typeface="+mn-ea"/>
+                <a:cs typeface="+mn-cs"/>
+              </a:defRPr>
+            </a:lvl5pPr>
+            <a:lvl6pPr marL="2286000" algn="l" defTabSz="914400" rtl="0" eaLnBrk="1" latinLnBrk="0" hangingPunct="1">
+              <a:defRPr kern="1200">
+                <a:solidFill>
+                  <a:schemeClr val="tx1"/>
+                </a:solidFill>
+                <a:latin typeface="Arial" charset="0"/>
+                <a:ea typeface="+mn-ea"/>
+                <a:cs typeface="+mn-cs"/>
+              </a:defRPr>
+            </a:lvl6pPr>
+            <a:lvl7pPr marL="2743200" algn="l" defTabSz="914400" rtl="0" eaLnBrk="1" latinLnBrk="0" hangingPunct="1">
+              <a:defRPr kern="1200">
+                <a:solidFill>
+                  <a:schemeClr val="tx1"/>
+                </a:solidFill>
+                <a:latin typeface="Arial" charset="0"/>
+                <a:ea typeface="+mn-ea"/>
+                <a:cs typeface="+mn-cs"/>
+              </a:defRPr>
+            </a:lvl7pPr>
+            <a:lvl8pPr marL="3200400" algn="l" defTabSz="914400" rtl="0" eaLnBrk="1" latinLnBrk="0" hangingPunct="1">
+              <a:defRPr kern="1200">
+                <a:solidFill>
+                  <a:schemeClr val="tx1"/>
+                </a:solidFill>
+                <a:latin typeface="Arial" charset="0"/>
+                <a:ea typeface="+mn-ea"/>
+                <a:cs typeface="+mn-cs"/>
+              </a:defRPr>
+            </a:lvl8pPr>
+            <a:lvl9pPr marL="3657600" algn="l" defTabSz="914400" rtl="0" eaLnBrk="1" latinLnBrk="0" hangingPunct="1">
+              <a:defRPr kern="1200">
+                <a:solidFill>
+                  <a:schemeClr val="tx1"/>
+                </a:solidFill>
+                <a:latin typeface="Arial" charset="0"/>
+                <a:ea typeface="+mn-ea"/>
+                <a:cs typeface="+mn-cs"/>
+              </a:defRPr>
+            </a:lvl9pPr>
+          </a:lstStyle>
+          <a:p>
+            <a:r>
+              <a:rPr lang="de-DE" sz="2400" dirty="0">
+                <a:solidFill>
+                  <a:srgbClr val="FF0000"/>
+                </a:solidFill>
+              </a:rPr>
+              <a:t>Übung</a:t>
+            </a:r>
+          </a:p>
+        </p:txBody>
+      </p:sp>
+    </p:spTree>
+    <p:extLst>
+      <p:ext uri="{BB962C8B-B14F-4D97-AF65-F5344CB8AC3E}">
+        <p14:creationId xmlns:p14="http://schemas.microsoft.com/office/powerpoint/2010/main" val="4067071390"/>
+      </p:ext>
+    </p:extLst>
+  </p:cSld>
+  <p:clrMapOvr>
+    <a:masterClrMapping/>
+  </p:clrMapOvr>
+</p:sld>
+</file>
+
+<file path=ppt/slides/slide6.xml><?xml version="1.0" encoding="utf-8"?>
+<p:sld xmlns:a="http://schemas.openxmlformats.org/drawingml/2006/main" xmlns:r="http://schemas.openxmlformats.org/officeDocument/2006/relationships" xmlns:p="http://schemas.openxmlformats.org/presentationml/2006/main">
+  <p:cSld>
+    <p:spTree>
+      <p:nvGrpSpPr>
+        <p:cNvPr id="1" name=""/>
+        <p:cNvGrpSpPr/>
+        <p:nvPr/>
+      </p:nvGrpSpPr>
+      <p:grpSpPr>
+        <a:xfrm>
+          <a:off x="0" y="0"/>
+          <a:ext cx="0" cy="0"/>
+          <a:chOff x="0" y="0"/>
+          <a:chExt cx="0" cy="0"/>
+        </a:xfrm>
+      </p:grpSpPr>
+      <p:sp>
+        <p:nvSpPr>
+          <p:cNvPr id="2" name="Titel 1">
+            <a:extLst>
+              <a:ext uri="{FF2B5EF4-FFF2-40B4-BE49-F238E27FC236}">
+                <a16:creationId xmlns:a16="http://schemas.microsoft.com/office/drawing/2014/main" id="{1D3464F8-6F24-FC58-7771-75A01B7776A4}"/>
+              </a:ext>
+            </a:extLst>
+          </p:cNvPr>
+          <p:cNvSpPr>
+            <a:spLocks noGrp="1"/>
+          </p:cNvSpPr>
+          <p:nvPr>
+            <p:ph type="title"/>
+          </p:nvPr>
+        </p:nvSpPr>
+        <p:spPr/>
+        <p:txBody>
+          <a:bodyPr/>
+          <a:lstStyle/>
+          <a:p>
+            <a:r>
+              <a:rPr lang="de-AT" dirty="0"/>
+              <a:t>Kontrolle im Protokoll</a:t>
+            </a:r>
+          </a:p>
+        </p:txBody>
+      </p:sp>
+      <p:sp>
+        <p:nvSpPr>
+          <p:cNvPr id="3" name="Textplatzhalter 2">
+            <a:extLst>
+              <a:ext uri="{FF2B5EF4-FFF2-40B4-BE49-F238E27FC236}">
+                <a16:creationId xmlns:a16="http://schemas.microsoft.com/office/drawing/2014/main" id="{99C30443-64F3-98B9-470E-CC9A59C1CCC2}"/>
+              </a:ext>
+            </a:extLst>
+          </p:cNvPr>
+          <p:cNvSpPr>
+            <a:spLocks noGrp="1"/>
+          </p:cNvSpPr>
+          <p:nvPr>
+            <p:ph type="body" sz="quarter" idx="10"/>
+          </p:nvPr>
+        </p:nvSpPr>
+        <p:spPr/>
+        <p:txBody>
+          <a:bodyPr/>
+          <a:lstStyle/>
+          <a:p>
+            <a:r>
+              <a:rPr lang="de-AT" dirty="0"/>
+              <a:t>Einstellung </a:t>
+            </a:r>
+            <a:r>
+              <a:rPr lang="de-AT" dirty="0">
+                <a:sym typeface="Wingdings" panose="05000000000000000000" pitchFamily="2" charset="2"/>
+              </a:rPr>
+              <a:t> System  Protokolle</a:t>
+            </a:r>
+          </a:p>
+          <a:p>
+            <a:r>
+              <a:rPr lang="de-AT" dirty="0" err="1">
+                <a:sym typeface="Wingdings" panose="05000000000000000000" pitchFamily="2" charset="2"/>
+              </a:rPr>
+              <a:t>Loglevel</a:t>
+            </a:r>
+            <a:r>
+              <a:rPr lang="de-AT">
+                <a:sym typeface="Wingdings" panose="05000000000000000000" pitchFamily="2" charset="2"/>
+              </a:rPr>
+              <a:t> beachten</a:t>
+            </a:r>
+            <a:endParaRPr lang="de-AT" dirty="0"/>
+          </a:p>
+        </p:txBody>
+      </p:sp>
+      <p:pic>
+        <p:nvPicPr>
+          <p:cNvPr id="5" name="Grafik 4">
+            <a:extLst>
+              <a:ext uri="{FF2B5EF4-FFF2-40B4-BE49-F238E27FC236}">
+                <a16:creationId xmlns:a16="http://schemas.microsoft.com/office/drawing/2014/main" id="{2B60639B-0B3A-1E7D-BA2B-0BF0D91EDE6F}"/>
+              </a:ext>
+            </a:extLst>
+          </p:cNvPr>
+          <p:cNvPicPr>
+            <a:picLocks noChangeAspect="1"/>
+          </p:cNvPicPr>
+          <p:nvPr/>
+        </p:nvPicPr>
+        <p:blipFill>
+          <a:blip r:embed="rId2"/>
+          <a:stretch>
+            <a:fillRect/>
+          </a:stretch>
+        </p:blipFill>
+        <p:spPr>
+          <a:xfrm>
+            <a:off x="2051720" y="3284984"/>
+            <a:ext cx="4724400" cy="2781300"/>
+          </a:xfrm>
+          <a:prstGeom prst="rect">
+            <a:avLst/>
+          </a:prstGeom>
+        </p:spPr>
+      </p:pic>
+    </p:spTree>
+    <p:extLst>
+      <p:ext uri="{BB962C8B-B14F-4D97-AF65-F5344CB8AC3E}">
+        <p14:creationId xmlns:p14="http://schemas.microsoft.com/office/powerpoint/2010/main" val="322736309"/>
+      </p:ext>
+    </p:extLst>
+  </p:cSld>
+  <p:clrMapOvr>
+    <a:masterClrMapping/>
+  </p:clrMapOvr>
+</p:sld>
+</file>
+
+<file path=ppt/slides/slide7.xml><?xml version="1.0" encoding="utf-8"?>
+<p:sld xmlns:a="http://schemas.openxmlformats.org/drawingml/2006/main" xmlns:r="http://schemas.openxmlformats.org/officeDocument/2006/relationships" xmlns:p="http://schemas.openxmlformats.org/presentationml/2006/main">
+  <p:cSld>
+    <p:spTree>
+      <p:nvGrpSpPr>
+        <p:cNvPr id="1" name=""/>
+        <p:cNvGrpSpPr/>
+        <p:nvPr/>
+      </p:nvGrpSpPr>
+      <p:grpSpPr>
+        <a:xfrm>
+          <a:off x="0" y="0"/>
+          <a:ext cx="0" cy="0"/>
+          <a:chOff x="0" y="0"/>
+          <a:chExt cx="0" cy="0"/>
+        </a:xfrm>
+      </p:grpSpPr>
+      <p:sp>
+        <p:nvSpPr>
+          <p:cNvPr id="2" name="Titel 1">
+            <a:extLst>
+              <a:ext uri="{FF2B5EF4-FFF2-40B4-BE49-F238E27FC236}">
+                <a16:creationId xmlns:a16="http://schemas.microsoft.com/office/drawing/2014/main" id="{2CA95393-F6E3-1BFB-13CF-8388C7400DB6}"/>
+              </a:ext>
+            </a:extLst>
+          </p:cNvPr>
+          <p:cNvSpPr>
+            <a:spLocks noGrp="1"/>
+          </p:cNvSpPr>
+          <p:nvPr>
+            <p:ph type="title"/>
+          </p:nvPr>
+        </p:nvSpPr>
+        <p:spPr/>
+        <p:txBody>
+          <a:bodyPr/>
+          <a:lstStyle/>
+          <a:p>
+            <a:r>
+              <a:rPr lang="de-AT" dirty="0" err="1"/>
+              <a:t>Notification</a:t>
+            </a:r>
+            <a:r>
+              <a:rPr lang="de-AT" dirty="0"/>
+              <a:t> mit Text und TTS</a:t>
+            </a:r>
+          </a:p>
+        </p:txBody>
+      </p:sp>
+      <p:sp>
+        <p:nvSpPr>
+          <p:cNvPr id="3" name="Textplatzhalter 2">
+            <a:extLst>
+              <a:ext uri="{FF2B5EF4-FFF2-40B4-BE49-F238E27FC236}">
+                <a16:creationId xmlns:a16="http://schemas.microsoft.com/office/drawing/2014/main" id="{2C230A9A-D5F7-23BB-41F2-A58C4E3D2E46}"/>
+              </a:ext>
+            </a:extLst>
+          </p:cNvPr>
+          <p:cNvSpPr>
+            <a:spLocks noGrp="1"/>
+          </p:cNvSpPr>
+          <p:nvPr>
+            <p:ph type="body" sz="quarter" idx="10"/>
+          </p:nvPr>
+        </p:nvSpPr>
+        <p:spPr>
+          <a:xfrm>
+            <a:off x="468313" y="1052736"/>
+            <a:ext cx="8207375" cy="4608165"/>
+          </a:xfrm>
+        </p:spPr>
+        <p:txBody>
+          <a:bodyPr/>
+          <a:lstStyle/>
+          <a:p>
+            <a:r>
+              <a:rPr lang="de-AT" dirty="0"/>
+              <a:t>Testautomation holt sich den </a:t>
+            </a:r>
+            <a:r>
+              <a:rPr lang="de-AT" dirty="0" err="1"/>
+              <a:t>Epex</a:t>
+            </a:r>
+            <a:r>
+              <a:rPr lang="de-AT" dirty="0"/>
+              <a:t>-Preis per </a:t>
+            </a:r>
+            <a:r>
+              <a:rPr lang="de-AT" dirty="0" err="1"/>
+              <a:t>Script</a:t>
+            </a:r>
+            <a:r>
+              <a:rPr lang="de-AT" dirty="0"/>
+              <a:t> und gibt ihn per TTS und per Text-</a:t>
+            </a:r>
+            <a:r>
+              <a:rPr lang="de-AT" dirty="0" err="1"/>
+              <a:t>Notification</a:t>
+            </a:r>
+            <a:r>
+              <a:rPr lang="de-AT" dirty="0"/>
+              <a:t> auf das Handy aus</a:t>
+            </a:r>
+          </a:p>
+          <a:p>
+            <a:pPr lvl="1"/>
+            <a:r>
+              <a:rPr lang="de-AT" dirty="0"/>
+              <a:t>Text für TTS sinnvoll anpassen</a:t>
+            </a:r>
+          </a:p>
+          <a:p>
+            <a:pPr lvl="1"/>
+            <a:r>
+              <a:rPr lang="de-AT" dirty="0"/>
+              <a:t>Text-</a:t>
+            </a:r>
+            <a:r>
+              <a:rPr lang="de-AT" dirty="0" err="1"/>
+              <a:t>Notification</a:t>
+            </a:r>
+            <a:r>
+              <a:rPr lang="de-AT" dirty="0"/>
+              <a:t> in der Form </a:t>
+            </a:r>
+            <a:br>
+              <a:rPr lang="de-AT" dirty="0"/>
+            </a:br>
+            <a:r>
+              <a:rPr lang="de-AT" dirty="0"/>
+              <a:t>		„🪙 Strompreis aktuell: 22 ct/kWh“</a:t>
+            </a:r>
+          </a:p>
+          <a:p>
+            <a:pPr lvl="2"/>
+            <a:r>
+              <a:rPr lang="de-AT" dirty="0"/>
+              <a:t>https://emojipedia.org/</a:t>
+            </a:r>
+          </a:p>
+          <a:p>
+            <a:pPr lvl="2"/>
+            <a:endParaRPr lang="de-AT" dirty="0"/>
+          </a:p>
+        </p:txBody>
+      </p:sp>
+      <p:sp>
+        <p:nvSpPr>
+          <p:cNvPr id="4" name="Textfeld 4">
+            <a:extLst>
+              <a:ext uri="{FF2B5EF4-FFF2-40B4-BE49-F238E27FC236}">
+                <a16:creationId xmlns:a16="http://schemas.microsoft.com/office/drawing/2014/main" id="{C26EE775-A78E-82E0-58A2-CF8E94118CF7}"/>
+              </a:ext>
+            </a:extLst>
+          </p:cNvPr>
+          <p:cNvSpPr txBox="1"/>
+          <p:nvPr/>
+        </p:nvSpPr>
+        <p:spPr>
+          <a:xfrm rot="20109396">
+            <a:off x="7896544" y="6143346"/>
+            <a:ext cx="1093569" cy="461665"/>
+          </a:xfrm>
+          <a:prstGeom prst="rect">
+            <a:avLst/>
+          </a:prstGeom>
+          <a:noFill/>
+        </p:spPr>
+        <p:txBody>
+          <a:bodyPr wrap="none" rtlCol="0">
+            <a:spAutoFit/>
+          </a:bodyPr>
+          <a:lstStyle>
+            <a:defPPr>
+              <a:defRPr lang="de-DE"/>
+            </a:defPPr>
+            <a:lvl1pPr algn="l" rtl="0" fontAlgn="base">
+              <a:spcBef>
+                <a:spcPct val="0"/>
+              </a:spcBef>
+              <a:spcAft>
+                <a:spcPct val="0"/>
+              </a:spcAft>
+              <a:defRPr kern="1200">
+                <a:solidFill>
+                  <a:schemeClr val="tx1"/>
+                </a:solidFill>
+                <a:latin typeface="Arial" charset="0"/>
+                <a:ea typeface="+mn-ea"/>
+                <a:cs typeface="+mn-cs"/>
+              </a:defRPr>
+            </a:lvl1pPr>
+            <a:lvl2pPr marL="457200" algn="l" rtl="0" fontAlgn="base">
+              <a:spcBef>
+                <a:spcPct val="0"/>
+              </a:spcBef>
+              <a:spcAft>
+                <a:spcPct val="0"/>
+              </a:spcAft>
+              <a:defRPr kern="1200">
+                <a:solidFill>
+                  <a:schemeClr val="tx1"/>
+                </a:solidFill>
+                <a:latin typeface="Arial" charset="0"/>
+                <a:ea typeface="+mn-ea"/>
+                <a:cs typeface="+mn-cs"/>
+              </a:defRPr>
+            </a:lvl2pPr>
+            <a:lvl3pPr marL="914400" algn="l" rtl="0" fontAlgn="base">
+              <a:spcBef>
+                <a:spcPct val="0"/>
+              </a:spcBef>
+              <a:spcAft>
+                <a:spcPct val="0"/>
+              </a:spcAft>
+              <a:defRPr kern="1200">
+                <a:solidFill>
+                  <a:schemeClr val="tx1"/>
+                </a:solidFill>
+                <a:latin typeface="Arial" charset="0"/>
+                <a:ea typeface="+mn-ea"/>
+                <a:cs typeface="+mn-cs"/>
+              </a:defRPr>
+            </a:lvl3pPr>
+            <a:lvl4pPr marL="1371600" algn="l" rtl="0" fontAlgn="base">
+              <a:spcBef>
+                <a:spcPct val="0"/>
+              </a:spcBef>
+              <a:spcAft>
+                <a:spcPct val="0"/>
+              </a:spcAft>
+              <a:defRPr kern="1200">
+                <a:solidFill>
+                  <a:schemeClr val="tx1"/>
+                </a:solidFill>
+                <a:latin typeface="Arial" charset="0"/>
+                <a:ea typeface="+mn-ea"/>
+                <a:cs typeface="+mn-cs"/>
+              </a:defRPr>
+            </a:lvl4pPr>
+            <a:lvl5pPr marL="1828800" algn="l" rtl="0" fontAlgn="base">
+              <a:spcBef>
+                <a:spcPct val="0"/>
+              </a:spcBef>
+              <a:spcAft>
+                <a:spcPct val="0"/>
+              </a:spcAft>
+              <a:defRPr kern="1200">
+                <a:solidFill>
+                  <a:schemeClr val="tx1"/>
+                </a:solidFill>
+                <a:latin typeface="Arial" charset="0"/>
+                <a:ea typeface="+mn-ea"/>
+                <a:cs typeface="+mn-cs"/>
+              </a:defRPr>
+            </a:lvl5pPr>
+            <a:lvl6pPr marL="2286000" algn="l" defTabSz="914400" rtl="0" eaLnBrk="1" latinLnBrk="0" hangingPunct="1">
+              <a:defRPr kern="1200">
+                <a:solidFill>
+                  <a:schemeClr val="tx1"/>
+                </a:solidFill>
+                <a:latin typeface="Arial" charset="0"/>
+                <a:ea typeface="+mn-ea"/>
+                <a:cs typeface="+mn-cs"/>
+              </a:defRPr>
+            </a:lvl6pPr>
+            <a:lvl7pPr marL="2743200" algn="l" defTabSz="914400" rtl="0" eaLnBrk="1" latinLnBrk="0" hangingPunct="1">
+              <a:defRPr kern="1200">
+                <a:solidFill>
+                  <a:schemeClr val="tx1"/>
+                </a:solidFill>
+                <a:latin typeface="Arial" charset="0"/>
+                <a:ea typeface="+mn-ea"/>
+                <a:cs typeface="+mn-cs"/>
+              </a:defRPr>
+            </a:lvl7pPr>
+            <a:lvl8pPr marL="3200400" algn="l" defTabSz="914400" rtl="0" eaLnBrk="1" latinLnBrk="0" hangingPunct="1">
+              <a:defRPr kern="1200">
+                <a:solidFill>
+                  <a:schemeClr val="tx1"/>
+                </a:solidFill>
+                <a:latin typeface="Arial" charset="0"/>
+                <a:ea typeface="+mn-ea"/>
+                <a:cs typeface="+mn-cs"/>
+              </a:defRPr>
+            </a:lvl8pPr>
+            <a:lvl9pPr marL="3657600" algn="l" defTabSz="914400" rtl="0" eaLnBrk="1" latinLnBrk="0" hangingPunct="1">
+              <a:defRPr kern="1200">
+                <a:solidFill>
+                  <a:schemeClr val="tx1"/>
+                </a:solidFill>
+                <a:latin typeface="Arial" charset="0"/>
+                <a:ea typeface="+mn-ea"/>
+                <a:cs typeface="+mn-cs"/>
+              </a:defRPr>
+            </a:lvl9pPr>
+          </a:lstStyle>
+          <a:p>
+            <a:r>
+              <a:rPr lang="de-DE" sz="2400" dirty="0">
+                <a:solidFill>
+                  <a:srgbClr val="FF0000"/>
+                </a:solidFill>
+              </a:rPr>
+              <a:t>Übung</a:t>
+            </a:r>
+          </a:p>
+        </p:txBody>
+      </p:sp>
+      <p:pic>
+        <p:nvPicPr>
+          <p:cNvPr id="6" name="Grafik 5">
+            <a:extLst>
+              <a:ext uri="{FF2B5EF4-FFF2-40B4-BE49-F238E27FC236}">
+                <a16:creationId xmlns:a16="http://schemas.microsoft.com/office/drawing/2014/main" id="{28AC5000-39F1-3FAC-C715-99494C5EFCEA}"/>
+              </a:ext>
+            </a:extLst>
+          </p:cNvPr>
+          <p:cNvPicPr>
+            <a:picLocks noChangeAspect="1"/>
+          </p:cNvPicPr>
+          <p:nvPr/>
+        </p:nvPicPr>
+        <p:blipFill>
+          <a:blip r:embed="rId3"/>
+          <a:stretch>
+            <a:fillRect/>
+          </a:stretch>
+        </p:blipFill>
+        <p:spPr>
+          <a:xfrm>
+            <a:off x="1691680" y="4674583"/>
+            <a:ext cx="5277985" cy="1425861"/>
+          </a:xfrm>
+          <a:prstGeom prst="rect">
+            <a:avLst/>
+          </a:prstGeom>
+        </p:spPr>
+      </p:pic>
+    </p:spTree>
+    <p:extLst>
+      <p:ext uri="{BB962C8B-B14F-4D97-AF65-F5344CB8AC3E}">
+        <p14:creationId xmlns:p14="http://schemas.microsoft.com/office/powerpoint/2010/main" val="2311491189"/>
+      </p:ext>
+    </p:extLst>
+  </p:cSld>
+  <p:clrMapOvr>
+    <a:masterClrMapping/>
+  </p:clrMapOvr>
+</p:sld>
+</file>
+
+<file path=ppt/slides/slide8.xml><?xml version="1.0" encoding="utf-8"?>
+<p:sld xmlns:a="http://schemas.openxmlformats.org/drawingml/2006/main" xmlns:r="http://schemas.openxmlformats.org/officeDocument/2006/relationships" xmlns:p="http://schemas.openxmlformats.org/presentationml/2006/main">
+  <p:cSld>
+    <p:spTree>
+      <p:nvGrpSpPr>
+        <p:cNvPr id="1" name=""/>
+        <p:cNvGrpSpPr/>
+        <p:nvPr/>
+      </p:nvGrpSpPr>
+      <p:grpSpPr>
+        <a:xfrm>
+          <a:off x="0" y="0"/>
+          <a:ext cx="0" cy="0"/>
+          <a:chOff x="0" y="0"/>
+          <a:chExt cx="0" cy="0"/>
+        </a:xfrm>
+      </p:grpSpPr>
+      <p:sp>
+        <p:nvSpPr>
+          <p:cNvPr id="2" name="Titel 1">
+            <a:extLst>
+              <a:ext uri="{FF2B5EF4-FFF2-40B4-BE49-F238E27FC236}">
+                <a16:creationId xmlns:a16="http://schemas.microsoft.com/office/drawing/2014/main" id="{8C060781-9A52-B5B4-C821-A1973375E4F8}"/>
+              </a:ext>
+            </a:extLst>
+          </p:cNvPr>
+          <p:cNvSpPr>
+            <a:spLocks noGrp="1"/>
+          </p:cNvSpPr>
+          <p:nvPr>
+            <p:ph type="title"/>
+          </p:nvPr>
+        </p:nvSpPr>
+        <p:spPr/>
+        <p:txBody>
+          <a:bodyPr/>
+          <a:lstStyle/>
+          <a:p>
+            <a:r>
+              <a:rPr lang="de-AT" dirty="0"/>
+              <a:t>Integration </a:t>
+            </a:r>
+            <a:r>
+              <a:rPr lang="de-AT" dirty="0" err="1"/>
+              <a:t>EpexSpot</a:t>
+            </a:r>
+            <a:endParaRPr lang="de-AT" dirty="0"/>
+          </a:p>
+        </p:txBody>
+      </p:sp>
+      <p:sp>
+        <p:nvSpPr>
+          <p:cNvPr id="3" name="Textplatzhalter 2">
+            <a:extLst>
+              <a:ext uri="{FF2B5EF4-FFF2-40B4-BE49-F238E27FC236}">
+                <a16:creationId xmlns:a16="http://schemas.microsoft.com/office/drawing/2014/main" id="{4A8B0558-AAD4-4C33-21F6-67F93642FBC6}"/>
+              </a:ext>
+            </a:extLst>
+          </p:cNvPr>
+          <p:cNvSpPr>
+            <a:spLocks noGrp="1"/>
+          </p:cNvSpPr>
+          <p:nvPr>
+            <p:ph type="body" sz="quarter" idx="10"/>
+          </p:nvPr>
+        </p:nvSpPr>
+        <p:spPr/>
+        <p:txBody>
+          <a:bodyPr/>
+          <a:lstStyle/>
+          <a:p>
+            <a:endParaRPr lang="de-AT"/>
+          </a:p>
+        </p:txBody>
+      </p:sp>
+      <p:pic>
+        <p:nvPicPr>
+          <p:cNvPr id="5" name="Grafik 4">
+            <a:extLst>
+              <a:ext uri="{FF2B5EF4-FFF2-40B4-BE49-F238E27FC236}">
+                <a16:creationId xmlns:a16="http://schemas.microsoft.com/office/drawing/2014/main" id="{88D60CF6-E327-B300-5505-1A0CDE9527FE}"/>
+              </a:ext>
+            </a:extLst>
+          </p:cNvPr>
+          <p:cNvPicPr>
+            <a:picLocks noChangeAspect="1"/>
+          </p:cNvPicPr>
+          <p:nvPr/>
+        </p:nvPicPr>
+        <p:blipFill>
+          <a:blip r:embed="rId2"/>
+          <a:stretch>
+            <a:fillRect/>
+          </a:stretch>
+        </p:blipFill>
+        <p:spPr>
+          <a:xfrm>
+            <a:off x="446887" y="1539004"/>
+            <a:ext cx="8460432" cy="4067676"/>
+          </a:xfrm>
+          <a:prstGeom prst="rect">
+            <a:avLst/>
+          </a:prstGeom>
+        </p:spPr>
+      </p:pic>
+    </p:spTree>
+    <p:extLst>
+      <p:ext uri="{BB962C8B-B14F-4D97-AF65-F5344CB8AC3E}">
+        <p14:creationId xmlns:p14="http://schemas.microsoft.com/office/powerpoint/2010/main" val="1167112770"/>
+      </p:ext>
+    </p:extLst>
+  </p:cSld>
+  <p:clrMapOvr>
+    <a:masterClrMapping/>
+  </p:clrMapOvr>
+</p:sld>
+</file>
+
+<file path=ppt/slides/slide9.xml><?xml version="1.0" encoding="utf-8"?>
+<p:sld xmlns:a="http://schemas.openxmlformats.org/drawingml/2006/main" xmlns:r="http://schemas.openxmlformats.org/officeDocument/2006/relationships" xmlns:p="http://schemas.openxmlformats.org/presentationml/2006/main">
+  <p:cSld>
+    <p:spTree>
+      <p:nvGrpSpPr>
+        <p:cNvPr id="1" name=""/>
+        <p:cNvGrpSpPr/>
+        <p:nvPr/>
+      </p:nvGrpSpPr>
+      <p:grpSpPr>
+        <a:xfrm>
+          <a:off x="0" y="0"/>
+          <a:ext cx="0" cy="0"/>
+          <a:chOff x="0" y="0"/>
+          <a:chExt cx="0" cy="0"/>
+        </a:xfrm>
+      </p:grpSpPr>
+      <p:sp>
+        <p:nvSpPr>
+          <p:cNvPr id="2" name="Titel 1">
+            <a:extLst>
+              <a:ext uri="{FF2B5EF4-FFF2-40B4-BE49-F238E27FC236}">
+                <a16:creationId xmlns:a16="http://schemas.microsoft.com/office/drawing/2014/main" id="{53AD6533-1404-45C0-647F-E7DE478DDE88}"/>
+              </a:ext>
+            </a:extLst>
+          </p:cNvPr>
+          <p:cNvSpPr>
+            <a:spLocks noGrp="1"/>
+          </p:cNvSpPr>
+          <p:nvPr>
+            <p:ph type="title"/>
+          </p:nvPr>
+        </p:nvSpPr>
+        <p:spPr/>
+        <p:txBody>
+          <a:bodyPr/>
+          <a:lstStyle/>
+          <a:p>
+            <a:r>
+              <a:rPr lang="de-AT" dirty="0" err="1"/>
+              <a:t>Script</a:t>
+            </a:r>
+            <a:endParaRPr lang="de-AT" dirty="0"/>
+          </a:p>
+        </p:txBody>
+      </p:sp>
+      <p:sp>
+        <p:nvSpPr>
+          <p:cNvPr id="3" name="Textplatzhalter 2">
+            <a:extLst>
+              <a:ext uri="{FF2B5EF4-FFF2-40B4-BE49-F238E27FC236}">
+                <a16:creationId xmlns:a16="http://schemas.microsoft.com/office/drawing/2014/main" id="{FE763B20-4915-FA8E-DC49-403A25098757}"/>
+              </a:ext>
+            </a:extLst>
+          </p:cNvPr>
+          <p:cNvSpPr>
+            <a:spLocks noGrp="1"/>
+          </p:cNvSpPr>
+          <p:nvPr>
+            <p:ph type="body" sz="quarter" idx="10"/>
+          </p:nvPr>
+        </p:nvSpPr>
+        <p:spPr/>
+        <p:txBody>
+          <a:bodyPr/>
+          <a:lstStyle/>
+          <a:p>
+            <a:endParaRPr lang="de-AT"/>
+          </a:p>
+        </p:txBody>
+      </p:sp>
+      <p:pic>
+        <p:nvPicPr>
+          <p:cNvPr id="5" name="Grafik 4">
+            <a:extLst>
+              <a:ext uri="{FF2B5EF4-FFF2-40B4-BE49-F238E27FC236}">
+                <a16:creationId xmlns:a16="http://schemas.microsoft.com/office/drawing/2014/main" id="{CD47B2B3-3D4B-9F26-636A-CF2A66DE419E}"/>
+              </a:ext>
+            </a:extLst>
+          </p:cNvPr>
+          <p:cNvPicPr>
+            <a:picLocks noChangeAspect="1"/>
+          </p:cNvPicPr>
+          <p:nvPr/>
+        </p:nvPicPr>
+        <p:blipFill>
+          <a:blip r:embed="rId2"/>
+          <a:stretch>
+            <a:fillRect/>
+          </a:stretch>
+        </p:blipFill>
+        <p:spPr>
+          <a:xfrm>
+            <a:off x="1804987" y="1237348"/>
+            <a:ext cx="5719341" cy="5414178"/>
+          </a:xfrm>
+          <a:prstGeom prst="rect">
+            <a:avLst/>
+          </a:prstGeom>
+        </p:spPr>
+      </p:pic>
+    </p:spTree>
+    <p:extLst>
+      <p:ext uri="{BB962C8B-B14F-4D97-AF65-F5344CB8AC3E}">
+        <p14:creationId xmlns:p14="http://schemas.microsoft.com/office/powerpoint/2010/main" val="755022490"/>
       </p:ext>
     </p:extLst>
   </p:cSld>
